--- a/요양시설스튜디오_화면기록.pptx
+++ b/요양시설스튜디오_화면기록.pptx
@@ -3155,8 +3155,8 @@
         </p:nvSpPr>
         <p:spPr>
           <a:xfrm>
-            <a:off x="0" y="2194560"/>
-            <a:ext cx="12191695" cy="2468880"/>
+            <a:off x="0" y="2103120"/>
+            <a:ext cx="12191695" cy="2651760"/>
           </a:xfrm>
           <a:prstGeom prst="rect">
             <a:avLst/>
@@ -3199,8 +3199,8 @@
         </p:nvSpPr>
         <p:spPr>
           <a:xfrm>
-            <a:off x="822960" y="2514600"/>
-            <a:ext cx="10515600" cy="274320"/>
+            <a:off x="822960" y="2423160"/>
+            <a:ext cx="10515600" cy="365760"/>
           </a:xfrm>
           <a:prstGeom prst="rect">
             <a:avLst/>
@@ -3213,6 +3213,14 @@
           </a:bodyPr>
           <a:lstStyle/>
           <a:p>
+            <a:pPr>
+              <a:spcBef>
+                <a:spcPts val="0"/>
+              </a:spcBef>
+              <a:spcAft>
+                <a:spcPts val="200"/>
+              </a:spcAft>
+            </a:pPr>
             <a:r>
               <a:rPr sz="4000" b="1">
                 <a:solidFill>
@@ -3233,8 +3241,8 @@
         </p:nvSpPr>
         <p:spPr>
           <a:xfrm>
-            <a:off x="822960" y="3429000"/>
-            <a:ext cx="10515600" cy="274320"/>
+            <a:off x="822960" y="3337560"/>
+            <a:ext cx="10515600" cy="365760"/>
           </a:xfrm>
           <a:prstGeom prst="rect">
             <a:avLst/>
@@ -3247,14 +3255,22 @@
           </a:bodyPr>
           <a:lstStyle/>
           <a:p>
-            <a:r>
-              <a:rPr sz="1800" b="0">
+            <a:pPr>
+              <a:spcBef>
+                <a:spcPts val="0"/>
+              </a:spcBef>
+              <a:spcAft>
+                <a:spcPts val="200"/>
+              </a:spcAft>
+            </a:pPr>
+            <a:r>
+              <a:rPr sz="1900" b="0">
                 <a:solidFill>
                   <a:srgbClr val="1A1A1A"/>
                 </a:solidFill>
                 <a:latin typeface="맑은 고딕"/>
               </a:rPr>
-              <a:t>화면 기록 — 기능별 캡처</a:t>
+              <a:t>화면 기록 — 무엇을 왜 만들었나</a:t>
             </a:r>
           </a:p>
         </p:txBody>
@@ -3267,8 +3283,8 @@
         </p:nvSpPr>
         <p:spPr>
           <a:xfrm>
-            <a:off x="822960" y="3977639"/>
-            <a:ext cx="10515600" cy="274320"/>
+            <a:off x="822960" y="3886200"/>
+            <a:ext cx="10515600" cy="365760"/>
           </a:xfrm>
           <a:prstGeom prst="rect">
             <a:avLst/>
@@ -3281,6 +3297,14 @@
           </a:bodyPr>
           <a:lstStyle/>
           <a:p>
+            <a:pPr>
+              <a:spcBef>
+                <a:spcPts val="0"/>
+              </a:spcBef>
+              <a:spcAft>
+                <a:spcPts val="200"/>
+              </a:spcAft>
+            </a:pPr>
             <a:r>
               <a:rPr sz="1300" b="0">
                 <a:solidFill>
@@ -3301,8 +3325,8 @@
         </p:nvSpPr>
         <p:spPr>
           <a:xfrm>
-            <a:off x="822960" y="5120640"/>
-            <a:ext cx="10515600" cy="274320"/>
+            <a:off x="822960" y="5166360"/>
+            <a:ext cx="10515600" cy="365760"/>
           </a:xfrm>
           <a:prstGeom prst="rect">
             <a:avLst/>
@@ -3315,6 +3339,56 @@
           </a:bodyPr>
           <a:lstStyle/>
           <a:p>
+            <a:pPr>
+              <a:spcBef>
+                <a:spcPts val="0"/>
+              </a:spcBef>
+              <a:spcAft>
+                <a:spcPts val="200"/>
+              </a:spcAft>
+            </a:pPr>
+            <a:r>
+              <a:rPr sz="1200" b="0">
+                <a:solidFill>
+                  <a:srgbClr val="595959"/>
+                </a:solidFill>
+                <a:latin typeface="맑은 고딕"/>
+              </a:rPr>
+              <a:t>화면마다 '하는 일 / 근거 / 알아둘 것'을 적었다. 근거는 법정 서식·평가지표·서비스모델 논문에서 옮긴 것이다.</a:t>
+            </a:r>
+          </a:p>
+        </p:txBody>
+      </p:sp>
+      <p:sp>
+        <p:nvSpPr>
+          <p:cNvPr id="8" name="TextBox 7"/>
+          <p:cNvSpPr txBox="1"/>
+          <p:nvPr/>
+        </p:nvSpPr>
+        <p:spPr>
+          <a:xfrm>
+            <a:off x="822960" y="5577840"/>
+            <a:ext cx="10515600" cy="365760"/>
+          </a:xfrm>
+          <a:prstGeom prst="rect">
+            <a:avLst/>
+          </a:prstGeom>
+          <a:noFill/>
+        </p:spPr>
+        <p:txBody>
+          <a:bodyPr wrap="square" lIns="0" rIns="0" tIns="0" bIns="0">
+            <a:spAutoFit/>
+          </a:bodyPr>
+          <a:lstStyle/>
+          <a:p>
+            <a:pPr>
+              <a:spcBef>
+                <a:spcPts val="0"/>
+              </a:spcBef>
+              <a:spcAft>
+                <a:spcPts val="200"/>
+              </a:spcAft>
+            </a:pPr>
             <a:r>
               <a:rPr sz="1200" b="0">
                 <a:solidFill>
@@ -3397,8 +3471,8 @@
         </p:nvSpPr>
         <p:spPr>
           <a:xfrm>
-            <a:off x="548640" y="384048"/>
-            <a:ext cx="8686800" cy="274320"/>
+            <a:off x="502920" y="347472"/>
+            <a:ext cx="7315200" cy="365760"/>
           </a:xfrm>
           <a:prstGeom prst="rect">
             <a:avLst/>
@@ -3411,6 +3485,14 @@
           </a:bodyPr>
           <a:lstStyle/>
           <a:p>
+            <a:pPr>
+              <a:spcBef>
+                <a:spcPts val="0"/>
+              </a:spcBef>
+              <a:spcAft>
+                <a:spcPts val="200"/>
+              </a:spcAft>
+            </a:pPr>
             <a:r>
               <a:rPr sz="2600" b="1">
                 <a:solidFill>
@@ -3431,8 +3513,8 @@
         </p:nvSpPr>
         <p:spPr>
           <a:xfrm>
-            <a:off x="548640" y="914400"/>
-            <a:ext cx="1463040" cy="28575"/>
+            <a:off x="502920" y="868680"/>
+            <a:ext cx="1280160" cy="28575"/>
           </a:xfrm>
           <a:prstGeom prst="rect">
             <a:avLst/>
@@ -3475,8 +3557,8 @@
         </p:nvSpPr>
         <p:spPr>
           <a:xfrm>
-            <a:off x="548640" y="1024128"/>
-            <a:ext cx="11064240" cy="274320"/>
+            <a:off x="502920" y="969264"/>
+            <a:ext cx="6949440" cy="365760"/>
           </a:xfrm>
           <a:prstGeom prst="rect">
             <a:avLst/>
@@ -3489,14 +3571,22 @@
           </a:bodyPr>
           <a:lstStyle/>
           <a:p>
-            <a:r>
-              <a:rPr sz="1200" b="0">
-                <a:solidFill>
-                  <a:srgbClr val="595959"/>
-                </a:solidFill>
-                <a:latin typeface="맑은 고딕"/>
-              </a:rPr>
-              <a:t>돌봄로봇·센서 + 매뉴얼·문의처 링크. 민간 ERP에 없는 화면</a:t>
+            <a:pPr>
+              <a:spcBef>
+                <a:spcPts val="0"/>
+              </a:spcBef>
+              <a:spcAft>
+                <a:spcPts val="200"/>
+              </a:spcAft>
+            </a:pPr>
+            <a:r>
+              <a:rPr sz="1300" b="0">
+                <a:solidFill>
+                  <a:srgbClr val="1A1A1A"/>
+                </a:solidFill>
+                <a:latin typeface="맑은 고딕"/>
+              </a:rPr>
+              <a:t>돌봄로봇·센서와 그 매뉴얼. 우리만 있는 화면.</a:t>
             </a:r>
           </a:p>
         </p:txBody>
@@ -3517,14 +3607,280 @@
         </p:blipFill>
         <p:spPr>
           <a:xfrm>
-            <a:off x="2575407" y="1463040"/>
-            <a:ext cx="7040880" cy="5029200"/>
+            <a:off x="502920" y="1371600"/>
+            <a:ext cx="6858000" cy="4898571"/>
           </a:xfrm>
           <a:prstGeom prst="rect">
             <a:avLst/>
           </a:prstGeom>
+          <a:ln w="9525">
+            <a:solidFill>
+              <a:srgbClr val="C7C7C7"/>
+            </a:solidFill>
+          </a:ln>
         </p:spPr>
       </p:pic>
+      <p:sp>
+        <p:nvSpPr>
+          <p:cNvPr id="7" name="Rounded Rectangle 6"/>
+          <p:cNvSpPr/>
+          <p:nvPr/>
+        </p:nvSpPr>
+        <p:spPr>
+          <a:xfrm>
+            <a:off x="7589520" y="1371600"/>
+            <a:ext cx="4099255" cy="5029200"/>
+          </a:xfrm>
+          <a:prstGeom prst="roundRect">
+            <a:avLst>
+              <a:gd name="adj" fmla="val 3000"/>
+            </a:avLst>
+          </a:prstGeom>
+          <a:solidFill>
+            <a:srgbClr val="FFFFFF"/>
+          </a:solidFill>
+          <a:ln w="12700">
+            <a:solidFill>
+              <a:srgbClr val="C7C7C7"/>
+            </a:solidFill>
+          </a:ln>
+          <a:effectLst/>
+        </p:spPr>
+        <p:style>
+          <a:lnRef idx="1">
+            <a:schemeClr val="accent1"/>
+          </a:lnRef>
+          <a:fillRef idx="3">
+            <a:schemeClr val="accent1"/>
+          </a:fillRef>
+          <a:effectRef idx="2">
+            <a:schemeClr val="accent1"/>
+          </a:effectRef>
+          <a:fontRef idx="minor">
+            <a:schemeClr val="lt1"/>
+          </a:fontRef>
+        </p:style>
+        <p:txBody>
+          <a:bodyPr rtlCol="0" anchor="ctr"/>
+          <a:lstStyle/>
+          <a:p>
+            <a:pPr algn="ctr"/>
+          </a:p>
+        </p:txBody>
+      </p:sp>
+      <p:sp>
+        <p:nvSpPr>
+          <p:cNvPr id="8" name="TextBox 7"/>
+          <p:cNvSpPr txBox="1"/>
+          <p:nvPr/>
+        </p:nvSpPr>
+        <p:spPr>
+          <a:xfrm>
+            <a:off x="7790688" y="1536192"/>
+            <a:ext cx="3696919" cy="4754880"/>
+          </a:xfrm>
+          <a:prstGeom prst="rect">
+            <a:avLst/>
+          </a:prstGeom>
+          <a:noFill/>
+        </p:spPr>
+        <p:txBody>
+          <a:bodyPr wrap="square" lIns="0" rIns="0" tIns="0" bIns="0">
+            <a:spAutoFit/>
+          </a:bodyPr>
+          <a:lstStyle/>
+          <a:p>
+            <a:pPr>
+              <a:spcBef>
+                <a:spcPts val="0"/>
+              </a:spcBef>
+              <a:spcAft>
+                <a:spcPts val="200"/>
+              </a:spcAft>
+            </a:pPr>
+            <a:r>
+              <a:rPr sz="1170" b="1">
+                <a:solidFill>
+                  <a:srgbClr val="C0206B"/>
+                </a:solidFill>
+                <a:latin typeface="맑은 고딕"/>
+              </a:rPr>
+              <a:t>하는 일</a:t>
+            </a:r>
+          </a:p>
+          <a:p>
+            <a:pPr>
+              <a:spcBef>
+                <a:spcPts val="300"/>
+              </a:spcBef>
+              <a:spcAft>
+                <a:spcPts val="200"/>
+              </a:spcAft>
+            </a:pPr>
+            <a:r>
+              <a:rPr sz="1050" b="0">
+                <a:solidFill>
+                  <a:srgbClr val="1A1A1A"/>
+                </a:solidFill>
+                <a:latin typeface="맑은 고딕"/>
+              </a:rPr>
+              <a:t>· 기기명·제조사·모델·위치·상태(사용중/점검중/고장/보관/반납)</a:t>
+            </a:r>
+          </a:p>
+          <a:p>
+            <a:pPr>
+              <a:spcBef>
+                <a:spcPts val="300"/>
+              </a:spcBef>
+              <a:spcAft>
+                <a:spcPts val="200"/>
+              </a:spcAft>
+            </a:pPr>
+            <a:r>
+              <a:rPr sz="1050" b="0">
+                <a:solidFill>
+                  <a:srgbClr val="1A1A1A"/>
+                </a:solidFill>
+                <a:latin typeface="맑은 고딕"/>
+              </a:rPr>
+              <a:t>· 기기마다 매뉴얼·설치안내·문제해결·A/S 문의처 링크를 붙인다</a:t>
+            </a:r>
+          </a:p>
+          <a:p>
+            <a:pPr>
+              <a:spcBef>
+                <a:spcPts val="300"/>
+              </a:spcBef>
+              <a:spcAft>
+                <a:spcPts val="200"/>
+              </a:spcAft>
+            </a:pPr>
+            <a:r>
+              <a:rPr sz="1050" b="0">
+                <a:solidFill>
+                  <a:srgbClr val="1A1A1A"/>
+                </a:solidFill>
+                <a:latin typeface="맑은 고딕"/>
+              </a:rPr>
+              <a:t>· 홈에서 '손봐야 할 기기'(고장·점검중)를 따로 알린다</a:t>
+            </a:r>
+          </a:p>
+          <a:p>
+            <a:pPr>
+              <a:spcBef>
+                <a:spcPts val="900"/>
+              </a:spcBef>
+              <a:spcAft>
+                <a:spcPts val="200"/>
+              </a:spcAft>
+            </a:pPr>
+            <a:r>
+              <a:rPr sz="1170" b="1">
+                <a:solidFill>
+                  <a:srgbClr val="C0206B"/>
+                </a:solidFill>
+                <a:latin typeface="맑은 고딕"/>
+              </a:rPr>
+              <a:t>근거</a:t>
+            </a:r>
+          </a:p>
+          <a:p>
+            <a:pPr>
+              <a:spcBef>
+                <a:spcPts val="300"/>
+              </a:spcBef>
+              <a:spcAft>
+                <a:spcPts val="200"/>
+              </a:spcAft>
+            </a:pPr>
+            <a:r>
+              <a:rPr sz="1050" b="0">
+                <a:solidFill>
+                  <a:srgbClr val="595959"/>
+                </a:solidFill>
+                <a:latin typeface="맑은 고딕"/>
+              </a:rPr>
+              <a:t>· 논문 AS-IS 문제 4 — 기기는 들어오기만 하고 문제가 생겨도 공급자에게 돌아갈 길이 없다</a:t>
+            </a:r>
+          </a:p>
+          <a:p>
+            <a:pPr>
+              <a:spcBef>
+                <a:spcPts val="300"/>
+              </a:spcBef>
+              <a:spcAft>
+                <a:spcPts val="200"/>
+              </a:spcAft>
+            </a:pPr>
+            <a:r>
+              <a:rPr sz="1050" b="0">
+                <a:solidFill>
+                  <a:srgbClr val="595959"/>
+                </a:solidFill>
+                <a:latin typeface="맑은 고딕"/>
+              </a:rPr>
+              <a:t>· 예시 8종은 논문 TO-BE 블루프린트에서 옮겼다 — 근력지원·이동·이승·배설·식사·목욕·모니터링·의사소통</a:t>
+            </a:r>
+          </a:p>
+          <a:p>
+            <a:pPr>
+              <a:spcBef>
+                <a:spcPts val="900"/>
+              </a:spcBef>
+              <a:spcAft>
+                <a:spcPts val="200"/>
+              </a:spcAft>
+            </a:pPr>
+            <a:r>
+              <a:rPr sz="1170" b="1">
+                <a:solidFill>
+                  <a:srgbClr val="C0206B"/>
+                </a:solidFill>
+                <a:latin typeface="맑은 고딕"/>
+              </a:rPr>
+              <a:t>알아둘 것</a:t>
+            </a:r>
+          </a:p>
+          <a:p>
+            <a:pPr>
+              <a:spcBef>
+                <a:spcPts val="300"/>
+              </a:spcBef>
+              <a:spcAft>
+                <a:spcPts val="200"/>
+              </a:spcAft>
+            </a:pPr>
+            <a:r>
+              <a:rPr sz="1050" b="0">
+                <a:solidFill>
+                  <a:srgbClr val="595959"/>
+                </a:solidFill>
+                <a:latin typeface="맑은 고딕"/>
+              </a:rPr>
+              <a:t>· 민간 ERP 조사 결과 이 칸이 어디에도 없다. 케어포 11개 메뉴, 이지케어 12개 메뉴 어디에도 기기·로봇이 없다</a:t>
+            </a:r>
+          </a:p>
+          <a:p>
+            <a:pPr>
+              <a:spcBef>
+                <a:spcPts val="300"/>
+              </a:spcBef>
+              <a:spcAft>
+                <a:spcPts val="200"/>
+              </a:spcAft>
+            </a:pPr>
+            <a:r>
+              <a:rPr sz="1050" b="0">
+                <a:solidFill>
+                  <a:srgbClr val="595959"/>
+                </a:solidFill>
+                <a:latin typeface="맑은 고딕"/>
+              </a:rPr>
+              <a:t>· 파일이 아니라 링크를 받는다 — 제조사가 개정하면 저절로 최신본</a:t>
+            </a:r>
+          </a:p>
+        </p:txBody>
+      </p:sp>
     </p:spTree>
   </p:cSld>
   <p:clrMapOvr>
@@ -3595,8 +3951,8 @@
         </p:nvSpPr>
         <p:spPr>
           <a:xfrm>
-            <a:off x="548640" y="384048"/>
-            <a:ext cx="8686800" cy="274320"/>
+            <a:off x="502920" y="347472"/>
+            <a:ext cx="7315200" cy="365760"/>
           </a:xfrm>
           <a:prstGeom prst="rect">
             <a:avLst/>
@@ -3609,6 +3965,14 @@
           </a:bodyPr>
           <a:lstStyle/>
           <a:p>
+            <a:pPr>
+              <a:spcBef>
+                <a:spcPts val="0"/>
+              </a:spcBef>
+              <a:spcAft>
+                <a:spcPts val="200"/>
+              </a:spcAft>
+            </a:pPr>
             <a:r>
               <a:rPr sz="2600" b="1">
                 <a:solidFill>
@@ -3629,8 +3993,8 @@
         </p:nvSpPr>
         <p:spPr>
           <a:xfrm>
-            <a:off x="548640" y="914400"/>
-            <a:ext cx="1463040" cy="28575"/>
+            <a:off x="502920" y="868680"/>
+            <a:ext cx="1280160" cy="28575"/>
           </a:xfrm>
           <a:prstGeom prst="rect">
             <a:avLst/>
@@ -3673,8 +4037,8 @@
         </p:nvSpPr>
         <p:spPr>
           <a:xfrm>
-            <a:off x="548640" y="1024128"/>
-            <a:ext cx="11064240" cy="274320"/>
+            <a:off x="502920" y="969264"/>
+            <a:ext cx="6949440" cy="365760"/>
           </a:xfrm>
           <a:prstGeom prst="rect">
             <a:avLst/>
@@ -3687,14 +4051,22 @@
           </a:bodyPr>
           <a:lstStyle/>
           <a:p>
-            <a:r>
-              <a:rPr sz="1200" b="0">
-                <a:solidFill>
-                  <a:srgbClr val="595959"/>
-                </a:solidFill>
-                <a:latin typeface="맑은 고딕"/>
-              </a:rPr>
-              <a:t>직원별 근무 지정(지표3·4 인력기준)</a:t>
+            <a:pPr>
+              <a:spcBef>
+                <a:spcPts val="0"/>
+              </a:spcBef>
+              <a:spcAft>
+                <a:spcPts val="200"/>
+              </a:spcAft>
+            </a:pPr>
+            <a:r>
+              <a:rPr sz="1300" b="0">
+                <a:solidFill>
+                  <a:srgbClr val="1A1A1A"/>
+                </a:solidFill>
+                <a:latin typeface="맑은 고딕"/>
+              </a:rPr>
+              <a:t>누가 언제 근무했는지 남긴다.</a:t>
             </a:r>
           </a:p>
         </p:txBody>
@@ -3715,14 +4087,242 @@
         </p:blipFill>
         <p:spPr>
           <a:xfrm>
-            <a:off x="2575407" y="1463040"/>
-            <a:ext cx="7040880" cy="5029200"/>
+            <a:off x="502920" y="1371600"/>
+            <a:ext cx="6858000" cy="4898571"/>
           </a:xfrm>
           <a:prstGeom prst="rect">
             <a:avLst/>
           </a:prstGeom>
+          <a:ln w="9525">
+            <a:solidFill>
+              <a:srgbClr val="C7C7C7"/>
+            </a:solidFill>
+          </a:ln>
         </p:spPr>
       </p:pic>
+      <p:sp>
+        <p:nvSpPr>
+          <p:cNvPr id="7" name="Rounded Rectangle 6"/>
+          <p:cNvSpPr/>
+          <p:nvPr/>
+        </p:nvSpPr>
+        <p:spPr>
+          <a:xfrm>
+            <a:off x="7589520" y="1371600"/>
+            <a:ext cx="4099255" cy="5029200"/>
+          </a:xfrm>
+          <a:prstGeom prst="roundRect">
+            <a:avLst>
+              <a:gd name="adj" fmla="val 3000"/>
+            </a:avLst>
+          </a:prstGeom>
+          <a:solidFill>
+            <a:srgbClr val="FFFFFF"/>
+          </a:solidFill>
+          <a:ln w="12700">
+            <a:solidFill>
+              <a:srgbClr val="C7C7C7"/>
+            </a:solidFill>
+          </a:ln>
+          <a:effectLst/>
+        </p:spPr>
+        <p:style>
+          <a:lnRef idx="1">
+            <a:schemeClr val="accent1"/>
+          </a:lnRef>
+          <a:fillRef idx="3">
+            <a:schemeClr val="accent1"/>
+          </a:fillRef>
+          <a:effectRef idx="2">
+            <a:schemeClr val="accent1"/>
+          </a:effectRef>
+          <a:fontRef idx="minor">
+            <a:schemeClr val="lt1"/>
+          </a:fontRef>
+        </p:style>
+        <p:txBody>
+          <a:bodyPr rtlCol="0" anchor="ctr"/>
+          <a:lstStyle/>
+          <a:p>
+            <a:pPr algn="ctr"/>
+          </a:p>
+        </p:txBody>
+      </p:sp>
+      <p:sp>
+        <p:nvSpPr>
+          <p:cNvPr id="8" name="TextBox 7"/>
+          <p:cNvSpPr txBox="1"/>
+          <p:nvPr/>
+        </p:nvSpPr>
+        <p:spPr>
+          <a:xfrm>
+            <a:off x="7790688" y="1536192"/>
+            <a:ext cx="3696919" cy="4754880"/>
+          </a:xfrm>
+          <a:prstGeom prst="rect">
+            <a:avLst/>
+          </a:prstGeom>
+          <a:noFill/>
+        </p:spPr>
+        <p:txBody>
+          <a:bodyPr wrap="square" lIns="0" rIns="0" tIns="0" bIns="0">
+            <a:spAutoFit/>
+          </a:bodyPr>
+          <a:lstStyle/>
+          <a:p>
+            <a:pPr>
+              <a:spcBef>
+                <a:spcPts val="0"/>
+              </a:spcBef>
+              <a:spcAft>
+                <a:spcPts val="200"/>
+              </a:spcAft>
+            </a:pPr>
+            <a:r>
+              <a:rPr sz="1170" b="1">
+                <a:solidFill>
+                  <a:srgbClr val="C0206B"/>
+                </a:solidFill>
+                <a:latin typeface="맑은 고딕"/>
+              </a:rPr>
+              <a:t>하는 일</a:t>
+            </a:r>
+          </a:p>
+          <a:p>
+            <a:pPr>
+              <a:spcBef>
+                <a:spcPts val="300"/>
+              </a:spcBef>
+              <a:spcAft>
+                <a:spcPts val="200"/>
+              </a:spcAft>
+            </a:pPr>
+            <a:r>
+              <a:rPr sz="1050" b="0">
+                <a:solidFill>
+                  <a:srgbClr val="1A1A1A"/>
+                </a:solidFill>
+                <a:latin typeface="맑은 고딕"/>
+              </a:rPr>
+              <a:t>· 직원별로 주간·오전·오후·야간·휴무·연차·교육 지정</a:t>
+            </a:r>
+          </a:p>
+          <a:p>
+            <a:pPr>
+              <a:spcBef>
+                <a:spcPts val="300"/>
+              </a:spcBef>
+              <a:spcAft>
+                <a:spcPts val="200"/>
+              </a:spcAft>
+            </a:pPr>
+            <a:r>
+              <a:rPr sz="1050" b="0">
+                <a:solidFill>
+                  <a:srgbClr val="1A1A1A"/>
+                </a:solidFill>
+                <a:latin typeface="맑은 고딕"/>
+              </a:rPr>
+              <a:t>· 오늘 근무자는 홈 맨 위에 뜬다</a:t>
+            </a:r>
+          </a:p>
+          <a:p>
+            <a:pPr>
+              <a:spcBef>
+                <a:spcPts val="900"/>
+              </a:spcBef>
+              <a:spcAft>
+                <a:spcPts val="200"/>
+              </a:spcAft>
+            </a:pPr>
+            <a:r>
+              <a:rPr sz="1170" b="1">
+                <a:solidFill>
+                  <a:srgbClr val="C0206B"/>
+                </a:solidFill>
+                <a:latin typeface="맑은 고딕"/>
+              </a:rPr>
+              <a:t>근거</a:t>
+            </a:r>
+          </a:p>
+          <a:p>
+            <a:pPr>
+              <a:spcBef>
+                <a:spcPts val="300"/>
+              </a:spcBef>
+              <a:spcAft>
+                <a:spcPts val="200"/>
+              </a:spcAft>
+            </a:pPr>
+            <a:r>
+              <a:rPr sz="1050" b="0">
+                <a:solidFill>
+                  <a:srgbClr val="595959"/>
+                </a:solidFill>
+                <a:latin typeface="맑은 고딕"/>
+              </a:rPr>
+              <a:t>· 지표 3 인력기준 준수 · 지표 4 인력 추가배치</a:t>
+            </a:r>
+          </a:p>
+          <a:p>
+            <a:pPr>
+              <a:spcBef>
+                <a:spcPts val="300"/>
+              </a:spcBef>
+              <a:spcAft>
+                <a:spcPts val="200"/>
+              </a:spcAft>
+            </a:pPr>
+            <a:r>
+              <a:rPr sz="1050" b="0">
+                <a:solidFill>
+                  <a:srgbClr val="595959"/>
+                </a:solidFill>
+                <a:latin typeface="맑은 고딕"/>
+              </a:rPr>
+              <a:t>· 고시 — 근무일지에 근무일자·출퇴근시간을 적어 보관해야 한다</a:t>
+            </a:r>
+          </a:p>
+          <a:p>
+            <a:pPr>
+              <a:spcBef>
+                <a:spcPts val="900"/>
+              </a:spcBef>
+              <a:spcAft>
+                <a:spcPts val="200"/>
+              </a:spcAft>
+            </a:pPr>
+            <a:r>
+              <a:rPr sz="1170" b="1">
+                <a:solidFill>
+                  <a:srgbClr val="C0206B"/>
+                </a:solidFill>
+                <a:latin typeface="맑은 고딕"/>
+              </a:rPr>
+              <a:t>알아둘 것</a:t>
+            </a:r>
+          </a:p>
+          <a:p>
+            <a:pPr>
+              <a:spcBef>
+                <a:spcPts val="300"/>
+              </a:spcBef>
+              <a:spcAft>
+                <a:spcPts val="200"/>
+              </a:spcAft>
+            </a:pPr>
+            <a:r>
+              <a:rPr sz="1050" b="0">
+                <a:solidFill>
+                  <a:srgbClr val="595959"/>
+                </a:solidFill>
+                <a:latin typeface="맑은 고딕"/>
+              </a:rPr>
+              <a:t>· 출퇴근 자동 기록(NFC)은 안 만들었다. 민간 ERP 영역이다</a:t>
+            </a:r>
+          </a:p>
+        </p:txBody>
+      </p:sp>
     </p:spTree>
   </p:cSld>
   <p:clrMapOvr>
@@ -3793,8 +4393,8 @@
         </p:nvSpPr>
         <p:spPr>
           <a:xfrm>
-            <a:off x="548640" y="384048"/>
-            <a:ext cx="8686800" cy="274320"/>
+            <a:off x="502920" y="347472"/>
+            <a:ext cx="7315200" cy="365760"/>
           </a:xfrm>
           <a:prstGeom prst="rect">
             <a:avLst/>
@@ -3807,6 +4407,14 @@
           </a:bodyPr>
           <a:lstStyle/>
           <a:p>
+            <a:pPr>
+              <a:spcBef>
+                <a:spcPts val="0"/>
+              </a:spcBef>
+              <a:spcAft>
+                <a:spcPts val="200"/>
+              </a:spcAft>
+            </a:pPr>
             <a:r>
               <a:rPr sz="2600" b="1">
                 <a:solidFill>
@@ -3827,8 +4435,8 @@
         </p:nvSpPr>
         <p:spPr>
           <a:xfrm>
-            <a:off x="548640" y="914400"/>
-            <a:ext cx="1463040" cy="28575"/>
+            <a:off x="502920" y="868680"/>
+            <a:ext cx="1280160" cy="28575"/>
           </a:xfrm>
           <a:prstGeom prst="rect">
             <a:avLst/>
@@ -3871,8 +4479,8 @@
         </p:nvSpPr>
         <p:spPr>
           <a:xfrm>
-            <a:off x="548640" y="1024128"/>
-            <a:ext cx="11064240" cy="274320"/>
+            <a:off x="502920" y="969264"/>
+            <a:ext cx="6949440" cy="365760"/>
           </a:xfrm>
           <a:prstGeom prst="rect">
             <a:avLst/>
@@ -3885,14 +4493,22 @@
           </a:bodyPr>
           <a:lstStyle/>
           <a:p>
-            <a:r>
-              <a:rPr sz="1200" b="0">
-                <a:solidFill>
-                  <a:srgbClr val="595959"/>
-                </a:solidFill>
-                <a:latin typeface="맑은 고딕"/>
-              </a:rPr>
-              <a:t>위생용품·프로그램 재료 등 요청·처리</a:t>
+            <a:pPr>
+              <a:spcBef>
+                <a:spcPts val="0"/>
+              </a:spcBef>
+              <a:spcAft>
+                <a:spcPts val="200"/>
+              </a:spcAft>
+            </a:pPr>
+            <a:r>
+              <a:rPr sz="1300" b="0">
+                <a:solidFill>
+                  <a:srgbClr val="1A1A1A"/>
+                </a:solidFill>
+                <a:latin typeface="맑은 고딕"/>
+              </a:rPr>
+              <a:t>현장에서 떨어지는 것을 적어 둔다.</a:t>
             </a:r>
           </a:p>
         </p:txBody>
@@ -3913,14 +4529,242 @@
         </p:blipFill>
         <p:spPr>
           <a:xfrm>
-            <a:off x="2575407" y="1463040"/>
-            <a:ext cx="7040880" cy="5029200"/>
+            <a:off x="502920" y="1371600"/>
+            <a:ext cx="6858000" cy="4898571"/>
           </a:xfrm>
           <a:prstGeom prst="rect">
             <a:avLst/>
           </a:prstGeom>
+          <a:ln w="9525">
+            <a:solidFill>
+              <a:srgbClr val="C7C7C7"/>
+            </a:solidFill>
+          </a:ln>
         </p:spPr>
       </p:pic>
+      <p:sp>
+        <p:nvSpPr>
+          <p:cNvPr id="7" name="Rounded Rectangle 6"/>
+          <p:cNvSpPr/>
+          <p:nvPr/>
+        </p:nvSpPr>
+        <p:spPr>
+          <a:xfrm>
+            <a:off x="7589520" y="1371600"/>
+            <a:ext cx="4099255" cy="5029200"/>
+          </a:xfrm>
+          <a:prstGeom prst="roundRect">
+            <a:avLst>
+              <a:gd name="adj" fmla="val 3000"/>
+            </a:avLst>
+          </a:prstGeom>
+          <a:solidFill>
+            <a:srgbClr val="FFFFFF"/>
+          </a:solidFill>
+          <a:ln w="12700">
+            <a:solidFill>
+              <a:srgbClr val="C7C7C7"/>
+            </a:solidFill>
+          </a:ln>
+          <a:effectLst/>
+        </p:spPr>
+        <p:style>
+          <a:lnRef idx="1">
+            <a:schemeClr val="accent1"/>
+          </a:lnRef>
+          <a:fillRef idx="3">
+            <a:schemeClr val="accent1"/>
+          </a:fillRef>
+          <a:effectRef idx="2">
+            <a:schemeClr val="accent1"/>
+          </a:effectRef>
+          <a:fontRef idx="minor">
+            <a:schemeClr val="lt1"/>
+          </a:fontRef>
+        </p:style>
+        <p:txBody>
+          <a:bodyPr rtlCol="0" anchor="ctr"/>
+          <a:lstStyle/>
+          <a:p>
+            <a:pPr algn="ctr"/>
+          </a:p>
+        </p:txBody>
+      </p:sp>
+      <p:sp>
+        <p:nvSpPr>
+          <p:cNvPr id="8" name="TextBox 7"/>
+          <p:cNvSpPr txBox="1"/>
+          <p:nvPr/>
+        </p:nvSpPr>
+        <p:spPr>
+          <a:xfrm>
+            <a:off x="7790688" y="1536192"/>
+            <a:ext cx="3696919" cy="4754880"/>
+          </a:xfrm>
+          <a:prstGeom prst="rect">
+            <a:avLst/>
+          </a:prstGeom>
+          <a:noFill/>
+        </p:spPr>
+        <p:txBody>
+          <a:bodyPr wrap="square" lIns="0" rIns="0" tIns="0" bIns="0">
+            <a:spAutoFit/>
+          </a:bodyPr>
+          <a:lstStyle/>
+          <a:p>
+            <a:pPr>
+              <a:spcBef>
+                <a:spcPts val="0"/>
+              </a:spcBef>
+              <a:spcAft>
+                <a:spcPts val="200"/>
+              </a:spcAft>
+            </a:pPr>
+            <a:r>
+              <a:rPr sz="1170" b="1">
+                <a:solidFill>
+                  <a:srgbClr val="C0206B"/>
+                </a:solidFill>
+                <a:latin typeface="맑은 고딕"/>
+              </a:rPr>
+              <a:t>하는 일</a:t>
+            </a:r>
+          </a:p>
+          <a:p>
+            <a:pPr>
+              <a:spcBef>
+                <a:spcPts val="300"/>
+              </a:spcBef>
+              <a:spcAft>
+                <a:spcPts val="200"/>
+              </a:spcAft>
+            </a:pPr>
+            <a:r>
+              <a:rPr sz="1050" b="0">
+                <a:solidFill>
+                  <a:srgbClr val="1A1A1A"/>
+                </a:solidFill>
+                <a:latin typeface="맑은 고딕"/>
+              </a:rPr>
+              <a:t>· 품목·분류(위생소모품/식자재/프로그램 재료/의료간호/사무/기기/기타)</a:t>
+            </a:r>
+          </a:p>
+          <a:p>
+            <a:pPr>
+              <a:spcBef>
+                <a:spcPts val="300"/>
+              </a:spcBef>
+              <a:spcAft>
+                <a:spcPts val="200"/>
+              </a:spcAft>
+            </a:pPr>
+            <a:r>
+              <a:rPr sz="1050" b="0">
+                <a:solidFill>
+                  <a:srgbClr val="1A1A1A"/>
+                </a:solidFill>
+                <a:latin typeface="맑은 고딕"/>
+              </a:rPr>
+              <a:t>· 수량·사유 · 상태(요청 → 구매중 → 완료/보류)</a:t>
+            </a:r>
+          </a:p>
+          <a:p>
+            <a:pPr>
+              <a:spcBef>
+                <a:spcPts val="300"/>
+              </a:spcBef>
+              <a:spcAft>
+                <a:spcPts val="200"/>
+              </a:spcAft>
+            </a:pPr>
+            <a:r>
+              <a:rPr sz="1050" b="0">
+                <a:solidFill>
+                  <a:srgbClr val="1A1A1A"/>
+                </a:solidFill>
+                <a:latin typeface="맑은 고딕"/>
+              </a:rPr>
+              <a:t>· 처리 대기와 완료를 나눠 보여준다</a:t>
+            </a:r>
+          </a:p>
+          <a:p>
+            <a:pPr>
+              <a:spcBef>
+                <a:spcPts val="900"/>
+              </a:spcBef>
+              <a:spcAft>
+                <a:spcPts val="200"/>
+              </a:spcAft>
+            </a:pPr>
+            <a:r>
+              <a:rPr sz="1170" b="1">
+                <a:solidFill>
+                  <a:srgbClr val="C0206B"/>
+                </a:solidFill>
+                <a:latin typeface="맑은 고딕"/>
+              </a:rPr>
+              <a:t>근거</a:t>
+            </a:r>
+          </a:p>
+          <a:p>
+            <a:pPr>
+              <a:spcBef>
+                <a:spcPts val="300"/>
+              </a:spcBef>
+              <a:spcAft>
+                <a:spcPts val="200"/>
+              </a:spcAft>
+            </a:pPr>
+            <a:r>
+              <a:rPr sz="1050" b="0">
+                <a:solidFill>
+                  <a:srgbClr val="595959"/>
+                </a:solidFill>
+                <a:latin typeface="맑은 고딕"/>
+              </a:rPr>
+              <a:t>· 평가지표가 요구하는 것은 아니다. 현장 편의 기능</a:t>
+            </a:r>
+          </a:p>
+          <a:p>
+            <a:pPr>
+              <a:spcBef>
+                <a:spcPts val="900"/>
+              </a:spcBef>
+              <a:spcAft>
+                <a:spcPts val="200"/>
+              </a:spcAft>
+            </a:pPr>
+            <a:r>
+              <a:rPr sz="1170" b="1">
+                <a:solidFill>
+                  <a:srgbClr val="C0206B"/>
+                </a:solidFill>
+                <a:latin typeface="맑은 고딕"/>
+              </a:rPr>
+              <a:t>알아둘 것</a:t>
+            </a:r>
+          </a:p>
+          <a:p>
+            <a:pPr>
+              <a:spcBef>
+                <a:spcPts val="300"/>
+              </a:spcBef>
+              <a:spcAft>
+                <a:spcPts val="200"/>
+              </a:spcAft>
+            </a:pPr>
+            <a:r>
+              <a:rPr sz="1050" b="0">
+                <a:solidFill>
+                  <a:srgbClr val="595959"/>
+                </a:solidFill>
+                <a:latin typeface="맑은 고딕"/>
+              </a:rPr>
+              <a:t>· Dolbom Studio 의 구매요청서 화면을 시설용으로 줄인 것</a:t>
+            </a:r>
+          </a:p>
+        </p:txBody>
+      </p:sp>
     </p:spTree>
   </p:cSld>
   <p:clrMapOvr>
@@ -3991,8 +4835,8 @@
         </p:nvSpPr>
         <p:spPr>
           <a:xfrm>
-            <a:off x="548640" y="384048"/>
-            <a:ext cx="8686800" cy="274320"/>
+            <a:off x="502920" y="347472"/>
+            <a:ext cx="7315200" cy="365760"/>
           </a:xfrm>
           <a:prstGeom prst="rect">
             <a:avLst/>
@@ -4005,6 +4849,14 @@
           </a:bodyPr>
           <a:lstStyle/>
           <a:p>
+            <a:pPr>
+              <a:spcBef>
+                <a:spcPts val="0"/>
+              </a:spcBef>
+              <a:spcAft>
+                <a:spcPts val="200"/>
+              </a:spcAft>
+            </a:pPr>
             <a:r>
               <a:rPr sz="2600" b="1">
                 <a:solidFill>
@@ -4025,8 +4877,8 @@
         </p:nvSpPr>
         <p:spPr>
           <a:xfrm>
-            <a:off x="548640" y="914400"/>
-            <a:ext cx="1463040" cy="28575"/>
+            <a:off x="502920" y="868680"/>
+            <a:ext cx="1280160" cy="28575"/>
           </a:xfrm>
           <a:prstGeom prst="rect">
             <a:avLst/>
@@ -4069,8 +4921,8 @@
         </p:nvSpPr>
         <p:spPr>
           <a:xfrm>
-            <a:off x="548640" y="1024128"/>
-            <a:ext cx="11064240" cy="274320"/>
+            <a:off x="502920" y="969264"/>
+            <a:ext cx="6949440" cy="365760"/>
           </a:xfrm>
           <a:prstGeom prst="rect">
             <a:avLst/>
@@ -4083,14 +4935,22 @@
           </a:bodyPr>
           <a:lstStyle/>
           <a:p>
-            <a:r>
-              <a:rPr sz="1200" b="0">
-                <a:solidFill>
-                  <a:srgbClr val="595959"/>
-                </a:solidFill>
-                <a:latin typeface="맑은 고딕"/>
-              </a:rPr>
-              <a:t>시설 공지</a:t>
+            <a:pPr>
+              <a:spcBef>
+                <a:spcPts val="0"/>
+              </a:spcBef>
+              <a:spcAft>
+                <a:spcPts val="200"/>
+              </a:spcAft>
+            </a:pPr>
+            <a:r>
+              <a:rPr sz="1300" b="0">
+                <a:solidFill>
+                  <a:srgbClr val="1A1A1A"/>
+                </a:solidFill>
+                <a:latin typeface="맑은 고딕"/>
+              </a:rPr>
+              <a:t>시설 전체에 알릴 것.</a:t>
             </a:r>
           </a:p>
         </p:txBody>
@@ -4111,14 +4971,166 @@
         </p:blipFill>
         <p:spPr>
           <a:xfrm>
-            <a:off x="2575407" y="1463040"/>
-            <a:ext cx="7040880" cy="5029200"/>
+            <a:off x="502920" y="1371600"/>
+            <a:ext cx="6858000" cy="4898571"/>
           </a:xfrm>
           <a:prstGeom prst="rect">
             <a:avLst/>
           </a:prstGeom>
+          <a:ln w="9525">
+            <a:solidFill>
+              <a:srgbClr val="C7C7C7"/>
+            </a:solidFill>
+          </a:ln>
         </p:spPr>
       </p:pic>
+      <p:sp>
+        <p:nvSpPr>
+          <p:cNvPr id="7" name="Rounded Rectangle 6"/>
+          <p:cNvSpPr/>
+          <p:nvPr/>
+        </p:nvSpPr>
+        <p:spPr>
+          <a:xfrm>
+            <a:off x="7589520" y="1371600"/>
+            <a:ext cx="4099255" cy="5029200"/>
+          </a:xfrm>
+          <a:prstGeom prst="roundRect">
+            <a:avLst>
+              <a:gd name="adj" fmla="val 3000"/>
+            </a:avLst>
+          </a:prstGeom>
+          <a:solidFill>
+            <a:srgbClr val="FFFFFF"/>
+          </a:solidFill>
+          <a:ln w="12700">
+            <a:solidFill>
+              <a:srgbClr val="C7C7C7"/>
+            </a:solidFill>
+          </a:ln>
+          <a:effectLst/>
+        </p:spPr>
+        <p:style>
+          <a:lnRef idx="1">
+            <a:schemeClr val="accent1"/>
+          </a:lnRef>
+          <a:fillRef idx="3">
+            <a:schemeClr val="accent1"/>
+          </a:fillRef>
+          <a:effectRef idx="2">
+            <a:schemeClr val="accent1"/>
+          </a:effectRef>
+          <a:fontRef idx="minor">
+            <a:schemeClr val="lt1"/>
+          </a:fontRef>
+        </p:style>
+        <p:txBody>
+          <a:bodyPr rtlCol="0" anchor="ctr"/>
+          <a:lstStyle/>
+          <a:p>
+            <a:pPr algn="ctr"/>
+          </a:p>
+        </p:txBody>
+      </p:sp>
+      <p:sp>
+        <p:nvSpPr>
+          <p:cNvPr id="8" name="TextBox 7"/>
+          <p:cNvSpPr txBox="1"/>
+          <p:nvPr/>
+        </p:nvSpPr>
+        <p:spPr>
+          <a:xfrm>
+            <a:off x="7790688" y="1536192"/>
+            <a:ext cx="3696919" cy="4754880"/>
+          </a:xfrm>
+          <a:prstGeom prst="rect">
+            <a:avLst/>
+          </a:prstGeom>
+          <a:noFill/>
+        </p:spPr>
+        <p:txBody>
+          <a:bodyPr wrap="square" lIns="0" rIns="0" tIns="0" bIns="0">
+            <a:spAutoFit/>
+          </a:bodyPr>
+          <a:lstStyle/>
+          <a:p>
+            <a:pPr>
+              <a:spcBef>
+                <a:spcPts val="0"/>
+              </a:spcBef>
+              <a:spcAft>
+                <a:spcPts val="200"/>
+              </a:spcAft>
+            </a:pPr>
+            <a:r>
+              <a:rPr sz="1170" b="1">
+                <a:solidFill>
+                  <a:srgbClr val="C0206B"/>
+                </a:solidFill>
+                <a:latin typeface="맑은 고딕"/>
+              </a:rPr>
+              <a:t>하는 일</a:t>
+            </a:r>
+          </a:p>
+          <a:p>
+            <a:pPr>
+              <a:spcBef>
+                <a:spcPts val="300"/>
+              </a:spcBef>
+              <a:spcAft>
+                <a:spcPts val="200"/>
+              </a:spcAft>
+            </a:pPr>
+            <a:r>
+              <a:rPr sz="1050" b="0">
+                <a:solidFill>
+                  <a:srgbClr val="1A1A1A"/>
+                </a:solidFill>
+                <a:latin typeface="맑은 고딕"/>
+              </a:rPr>
+              <a:t>· 누구나 등록·삭제. 홈 맨 위 카드로 뜬다</a:t>
+            </a:r>
+          </a:p>
+          <a:p>
+            <a:pPr>
+              <a:spcBef>
+                <a:spcPts val="900"/>
+              </a:spcBef>
+              <a:spcAft>
+                <a:spcPts val="200"/>
+              </a:spcAft>
+            </a:pPr>
+            <a:r>
+              <a:rPr sz="1170" b="1">
+                <a:solidFill>
+                  <a:srgbClr val="C0206B"/>
+                </a:solidFill>
+                <a:latin typeface="맑은 고딕"/>
+              </a:rPr>
+              <a:t>알아둘 것</a:t>
+            </a:r>
+          </a:p>
+          <a:p>
+            <a:pPr>
+              <a:spcBef>
+                <a:spcPts val="300"/>
+              </a:spcBef>
+              <a:spcAft>
+                <a:spcPts val="200"/>
+              </a:spcAft>
+            </a:pPr>
+            <a:r>
+              <a:rPr sz="1050" b="0">
+                <a:solidFill>
+                  <a:srgbClr val="595959"/>
+                </a:solidFill>
+                <a:latin typeface="맑은 고딕"/>
+              </a:rPr>
+              <a:t>· Dolbom Studio 의 팀 공지와 같은 구조</a:t>
+            </a:r>
+          </a:p>
+        </p:txBody>
+      </p:sp>
     </p:spTree>
   </p:cSld>
   <p:clrMapOvr>
@@ -4189,8 +5201,8 @@
         </p:nvSpPr>
         <p:spPr>
           <a:xfrm>
-            <a:off x="548640" y="384048"/>
-            <a:ext cx="8686800" cy="274320"/>
+            <a:off x="502920" y="347472"/>
+            <a:ext cx="7315200" cy="365760"/>
           </a:xfrm>
           <a:prstGeom prst="rect">
             <a:avLst/>
@@ -4203,6 +5215,14 @@
           </a:bodyPr>
           <a:lstStyle/>
           <a:p>
+            <a:pPr>
+              <a:spcBef>
+                <a:spcPts val="0"/>
+              </a:spcBef>
+              <a:spcAft>
+                <a:spcPts val="200"/>
+              </a:spcAft>
+            </a:pPr>
             <a:r>
               <a:rPr sz="2600" b="1">
                 <a:solidFill>
@@ -4223,8 +5243,8 @@
         </p:nvSpPr>
         <p:spPr>
           <a:xfrm>
-            <a:off x="548640" y="914400"/>
-            <a:ext cx="1463040" cy="28575"/>
+            <a:off x="502920" y="868680"/>
+            <a:ext cx="1280160" cy="28575"/>
           </a:xfrm>
           <a:prstGeom prst="rect">
             <a:avLst/>
@@ -4267,8 +5287,8 @@
         </p:nvSpPr>
         <p:spPr>
           <a:xfrm>
-            <a:off x="548640" y="1024128"/>
-            <a:ext cx="11064240" cy="274320"/>
+            <a:off x="502920" y="969264"/>
+            <a:ext cx="6949440" cy="365760"/>
           </a:xfrm>
           <a:prstGeom prst="rect">
             <a:avLst/>
@@ -4281,14 +5301,22 @@
           </a:bodyPr>
           <a:lstStyle/>
           <a:p>
-            <a:r>
-              <a:rPr sz="1200" b="0">
-                <a:solidFill>
-                  <a:srgbClr val="595959"/>
-                </a:solidFill>
-                <a:latin typeface="맑은 고딕"/>
-              </a:rPr>
-              <a:t>현장 개선 의견 접수·처리</a:t>
+            <a:pPr>
+              <a:spcBef>
+                <a:spcPts val="0"/>
+              </a:spcBef>
+              <a:spcAft>
+                <a:spcPts val="200"/>
+              </a:spcAft>
+            </a:pPr>
+            <a:r>
+              <a:rPr sz="1300" b="0">
+                <a:solidFill>
+                  <a:srgbClr val="1A1A1A"/>
+                </a:solidFill>
+                <a:latin typeface="맑은 고딕"/>
+              </a:rPr>
+              <a:t>쓰다가 불편한 것을 남긴다.</a:t>
             </a:r>
           </a:p>
         </p:txBody>
@@ -4309,14 +5337,166 @@
         </p:blipFill>
         <p:spPr>
           <a:xfrm>
-            <a:off x="2575407" y="1463040"/>
-            <a:ext cx="7040880" cy="5029200"/>
+            <a:off x="502920" y="1371600"/>
+            <a:ext cx="6858000" cy="4898571"/>
           </a:xfrm>
           <a:prstGeom prst="rect">
             <a:avLst/>
           </a:prstGeom>
+          <a:ln w="9525">
+            <a:solidFill>
+              <a:srgbClr val="C7C7C7"/>
+            </a:solidFill>
+          </a:ln>
         </p:spPr>
       </p:pic>
+      <p:sp>
+        <p:nvSpPr>
+          <p:cNvPr id="7" name="Rounded Rectangle 6"/>
+          <p:cNvSpPr/>
+          <p:nvPr/>
+        </p:nvSpPr>
+        <p:spPr>
+          <a:xfrm>
+            <a:off x="7589520" y="1371600"/>
+            <a:ext cx="4099255" cy="5029200"/>
+          </a:xfrm>
+          <a:prstGeom prst="roundRect">
+            <a:avLst>
+              <a:gd name="adj" fmla="val 3000"/>
+            </a:avLst>
+          </a:prstGeom>
+          <a:solidFill>
+            <a:srgbClr val="FFFFFF"/>
+          </a:solidFill>
+          <a:ln w="12700">
+            <a:solidFill>
+              <a:srgbClr val="C7C7C7"/>
+            </a:solidFill>
+          </a:ln>
+          <a:effectLst/>
+        </p:spPr>
+        <p:style>
+          <a:lnRef idx="1">
+            <a:schemeClr val="accent1"/>
+          </a:lnRef>
+          <a:fillRef idx="3">
+            <a:schemeClr val="accent1"/>
+          </a:fillRef>
+          <a:effectRef idx="2">
+            <a:schemeClr val="accent1"/>
+          </a:effectRef>
+          <a:fontRef idx="minor">
+            <a:schemeClr val="lt1"/>
+          </a:fontRef>
+        </p:style>
+        <p:txBody>
+          <a:bodyPr rtlCol="0" anchor="ctr"/>
+          <a:lstStyle/>
+          <a:p>
+            <a:pPr algn="ctr"/>
+          </a:p>
+        </p:txBody>
+      </p:sp>
+      <p:sp>
+        <p:nvSpPr>
+          <p:cNvPr id="8" name="TextBox 7"/>
+          <p:cNvSpPr txBox="1"/>
+          <p:nvPr/>
+        </p:nvSpPr>
+        <p:spPr>
+          <a:xfrm>
+            <a:off x="7790688" y="1536192"/>
+            <a:ext cx="3696919" cy="4754880"/>
+          </a:xfrm>
+          <a:prstGeom prst="rect">
+            <a:avLst/>
+          </a:prstGeom>
+          <a:noFill/>
+        </p:spPr>
+        <p:txBody>
+          <a:bodyPr wrap="square" lIns="0" rIns="0" tIns="0" bIns="0">
+            <a:spAutoFit/>
+          </a:bodyPr>
+          <a:lstStyle/>
+          <a:p>
+            <a:pPr>
+              <a:spcBef>
+                <a:spcPts val="0"/>
+              </a:spcBef>
+              <a:spcAft>
+                <a:spcPts val="200"/>
+              </a:spcAft>
+            </a:pPr>
+            <a:r>
+              <a:rPr sz="1170" b="1">
+                <a:solidFill>
+                  <a:srgbClr val="C0206B"/>
+                </a:solidFill>
+                <a:latin typeface="맑은 고딕"/>
+              </a:rPr>
+              <a:t>하는 일</a:t>
+            </a:r>
+          </a:p>
+          <a:p>
+            <a:pPr>
+              <a:spcBef>
+                <a:spcPts val="300"/>
+              </a:spcBef>
+              <a:spcAft>
+                <a:spcPts val="200"/>
+              </a:spcAft>
+            </a:pPr>
+            <a:r>
+              <a:rPr sz="1050" b="0">
+                <a:solidFill>
+                  <a:srgbClr val="1A1A1A"/>
+                </a:solidFill>
+                <a:latin typeface="맑은 고딕"/>
+              </a:rPr>
+              <a:t>· 분류 4종(개선·오류·문의·기기 이상), 상태 4종(접수·진행중·완료·보류)</a:t>
+            </a:r>
+          </a:p>
+          <a:p>
+            <a:pPr>
+              <a:spcBef>
+                <a:spcPts val="900"/>
+              </a:spcBef>
+              <a:spcAft>
+                <a:spcPts val="200"/>
+              </a:spcAft>
+            </a:pPr>
+            <a:r>
+              <a:rPr sz="1170" b="1">
+                <a:solidFill>
+                  <a:srgbClr val="C0206B"/>
+                </a:solidFill>
+                <a:latin typeface="맑은 고딕"/>
+              </a:rPr>
+              <a:t>알아둘 것</a:t>
+            </a:r>
+          </a:p>
+          <a:p>
+            <a:pPr>
+              <a:spcBef>
+                <a:spcPts val="300"/>
+              </a:spcBef>
+              <a:spcAft>
+                <a:spcPts val="200"/>
+              </a:spcAft>
+            </a:pPr>
+            <a:r>
+              <a:rPr sz="1050" b="0">
+                <a:solidFill>
+                  <a:srgbClr val="595959"/>
+                </a:solidFill>
+                <a:latin typeface="맑은 고딕"/>
+              </a:rPr>
+              <a:t>· 현장 의견이 있어야 다음 단계를 정할 수 있다. Dolbom Studio 의 '개선 요청'과 같은 자리</a:t>
+            </a:r>
+          </a:p>
+        </p:txBody>
+      </p:sp>
     </p:spTree>
   </p:cSld>
   <p:clrMapOvr>
@@ -4387,8 +5567,8 @@
         </p:nvSpPr>
         <p:spPr>
           <a:xfrm>
-            <a:off x="548640" y="384048"/>
-            <a:ext cx="8686800" cy="274320"/>
+            <a:off x="502920" y="347472"/>
+            <a:ext cx="7315200" cy="365760"/>
           </a:xfrm>
           <a:prstGeom prst="rect">
             <a:avLst/>
@@ -4401,6 +5581,14 @@
           </a:bodyPr>
           <a:lstStyle/>
           <a:p>
+            <a:pPr>
+              <a:spcBef>
+                <a:spcPts val="0"/>
+              </a:spcBef>
+              <a:spcAft>
+                <a:spcPts val="200"/>
+              </a:spcAft>
+            </a:pPr>
             <a:r>
               <a:rPr sz="2600" b="1">
                 <a:solidFill>
@@ -4421,8 +5609,8 @@
         </p:nvSpPr>
         <p:spPr>
           <a:xfrm>
-            <a:off x="548640" y="914400"/>
-            <a:ext cx="1463040" cy="28575"/>
+            <a:off x="502920" y="868680"/>
+            <a:ext cx="1280160" cy="28575"/>
           </a:xfrm>
           <a:prstGeom prst="rect">
             <a:avLst/>
@@ -4465,8 +5653,8 @@
         </p:nvSpPr>
         <p:spPr>
           <a:xfrm>
-            <a:off x="548640" y="1024128"/>
-            <a:ext cx="11064240" cy="274320"/>
+            <a:off x="502920" y="969264"/>
+            <a:ext cx="6949440" cy="365760"/>
           </a:xfrm>
           <a:prstGeom prst="rect">
             <a:avLst/>
@@ -4479,14 +5667,22 @@
           </a:bodyPr>
           <a:lstStyle/>
           <a:p>
-            <a:r>
-              <a:rPr sz="1200" b="0">
-                <a:solidFill>
-                  <a:srgbClr val="595959"/>
-                </a:solidFill>
-                <a:latin typeface="맑은 고딕"/>
-              </a:rPr>
-              <a:t>직원 등록 · PIN 발급(로그인) · 케어 항목 확인 · 전체 백업</a:t>
+            <a:pPr>
+              <a:spcBef>
+                <a:spcPts val="0"/>
+              </a:spcBef>
+              <a:spcAft>
+                <a:spcPts val="200"/>
+              </a:spcAft>
+            </a:pPr>
+            <a:r>
+              <a:rPr sz="1300" b="0">
+                <a:solidFill>
+                  <a:srgbClr val="1A1A1A"/>
+                </a:solidFill>
+                <a:latin typeface="맑은 고딕"/>
+              </a:rPr>
+              <a:t>직원·PIN·백업.</a:t>
             </a:r>
           </a:p>
         </p:txBody>
@@ -4507,14 +5703,299 @@
         </p:blipFill>
         <p:spPr>
           <a:xfrm>
-            <a:off x="2575407" y="1463040"/>
-            <a:ext cx="7040880" cy="5029200"/>
+            <a:off x="502920" y="1371600"/>
+            <a:ext cx="6858000" cy="4898571"/>
           </a:xfrm>
           <a:prstGeom prst="rect">
             <a:avLst/>
           </a:prstGeom>
+          <a:ln w="9525">
+            <a:solidFill>
+              <a:srgbClr val="C7C7C7"/>
+            </a:solidFill>
+          </a:ln>
         </p:spPr>
       </p:pic>
+      <p:sp>
+        <p:nvSpPr>
+          <p:cNvPr id="7" name="Rounded Rectangle 6"/>
+          <p:cNvSpPr/>
+          <p:nvPr/>
+        </p:nvSpPr>
+        <p:spPr>
+          <a:xfrm>
+            <a:off x="7589520" y="1371600"/>
+            <a:ext cx="4099255" cy="5029200"/>
+          </a:xfrm>
+          <a:prstGeom prst="roundRect">
+            <a:avLst>
+              <a:gd name="adj" fmla="val 3000"/>
+            </a:avLst>
+          </a:prstGeom>
+          <a:solidFill>
+            <a:srgbClr val="FFFFFF"/>
+          </a:solidFill>
+          <a:ln w="12700">
+            <a:solidFill>
+              <a:srgbClr val="C7C7C7"/>
+            </a:solidFill>
+          </a:ln>
+          <a:effectLst/>
+        </p:spPr>
+        <p:style>
+          <a:lnRef idx="1">
+            <a:schemeClr val="accent1"/>
+          </a:lnRef>
+          <a:fillRef idx="3">
+            <a:schemeClr val="accent1"/>
+          </a:fillRef>
+          <a:effectRef idx="2">
+            <a:schemeClr val="accent1"/>
+          </a:effectRef>
+          <a:fontRef idx="minor">
+            <a:schemeClr val="lt1"/>
+          </a:fontRef>
+        </p:style>
+        <p:txBody>
+          <a:bodyPr rtlCol="0" anchor="ctr"/>
+          <a:lstStyle/>
+          <a:p>
+            <a:pPr algn="ctr"/>
+          </a:p>
+        </p:txBody>
+      </p:sp>
+      <p:sp>
+        <p:nvSpPr>
+          <p:cNvPr id="8" name="TextBox 7"/>
+          <p:cNvSpPr txBox="1"/>
+          <p:nvPr/>
+        </p:nvSpPr>
+        <p:spPr>
+          <a:xfrm>
+            <a:off x="7790688" y="1536192"/>
+            <a:ext cx="3696919" cy="4754880"/>
+          </a:xfrm>
+          <a:prstGeom prst="rect">
+            <a:avLst/>
+          </a:prstGeom>
+          <a:noFill/>
+        </p:spPr>
+        <p:txBody>
+          <a:bodyPr wrap="square" lIns="0" rIns="0" tIns="0" bIns="0">
+            <a:spAutoFit/>
+          </a:bodyPr>
+          <a:lstStyle/>
+          <a:p>
+            <a:pPr>
+              <a:spcBef>
+                <a:spcPts val="0"/>
+              </a:spcBef>
+              <a:spcAft>
+                <a:spcPts val="200"/>
+              </a:spcAft>
+            </a:pPr>
+            <a:r>
+              <a:rPr sz="1170" b="1">
+                <a:solidFill>
+                  <a:srgbClr val="C0206B"/>
+                </a:solidFill>
+                <a:latin typeface="맑은 고딕"/>
+              </a:rPr>
+              <a:t>하는 일</a:t>
+            </a:r>
+          </a:p>
+          <a:p>
+            <a:pPr>
+              <a:spcBef>
+                <a:spcPts val="300"/>
+              </a:spcBef>
+              <a:spcAft>
+                <a:spcPts val="200"/>
+              </a:spcAft>
+            </a:pPr>
+            <a:r>
+              <a:rPr sz="1050" b="0">
+                <a:solidFill>
+                  <a:srgbClr val="1A1A1A"/>
+                </a:solidFill>
+                <a:latin typeface="맑은 고딕"/>
+              </a:rPr>
+              <a:t>· 직원 등록(요양보호사·사회복지사·간호(조무)사·물리작업치료사·센터장·운전원)</a:t>
+            </a:r>
+          </a:p>
+          <a:p>
+            <a:pPr>
+              <a:spcBef>
+                <a:spcPts val="300"/>
+              </a:spcBef>
+              <a:spcAft>
+                <a:spcPts val="200"/>
+              </a:spcAft>
+            </a:pPr>
+            <a:r>
+              <a:rPr sz="1050" b="0">
+                <a:solidFill>
+                  <a:srgbClr val="1A1A1A"/>
+                </a:solidFill>
+                <a:latin typeface="맑은 고딕"/>
+              </a:rPr>
+              <a:t>· PIN 발급 — 숫자 4~8자리. 하나라도 걸면 로그인 화면이 생긴다</a:t>
+            </a:r>
+          </a:p>
+          <a:p>
+            <a:pPr>
+              <a:spcBef>
+                <a:spcPts val="300"/>
+              </a:spcBef>
+              <a:spcAft>
+                <a:spcPts val="200"/>
+              </a:spcAft>
+            </a:pPr>
+            <a:r>
+              <a:rPr sz="1050" b="0">
+                <a:solidFill>
+                  <a:srgbClr val="1A1A1A"/>
+                </a:solidFill>
+                <a:latin typeface="맑은 고딕"/>
+              </a:rPr>
+              <a:t>· 케어 항목 목록 확인</a:t>
+            </a:r>
+          </a:p>
+          <a:p>
+            <a:pPr>
+              <a:spcBef>
+                <a:spcPts val="300"/>
+              </a:spcBef>
+              <a:spcAft>
+                <a:spcPts val="200"/>
+              </a:spcAft>
+            </a:pPr>
+            <a:r>
+              <a:rPr sz="1050" b="0">
+                <a:solidFill>
+                  <a:srgbClr val="1A1A1A"/>
+                </a:solidFill>
+                <a:latin typeface="맑은 고딕"/>
+              </a:rPr>
+              <a:t>· 전체 데이터 백업(zip)</a:t>
+            </a:r>
+          </a:p>
+          <a:p>
+            <a:pPr>
+              <a:spcBef>
+                <a:spcPts val="900"/>
+              </a:spcBef>
+              <a:spcAft>
+                <a:spcPts val="200"/>
+              </a:spcAft>
+            </a:pPr>
+            <a:r>
+              <a:rPr sz="1170" b="1">
+                <a:solidFill>
+                  <a:srgbClr val="C0206B"/>
+                </a:solidFill>
+                <a:latin typeface="맑은 고딕"/>
+              </a:rPr>
+              <a:t>근거</a:t>
+            </a:r>
+          </a:p>
+          <a:p>
+            <a:pPr>
+              <a:spcBef>
+                <a:spcPts val="300"/>
+              </a:spcBef>
+              <a:spcAft>
+                <a:spcPts val="200"/>
+              </a:spcAft>
+            </a:pPr>
+            <a:r>
+              <a:rPr sz="1050" b="0">
+                <a:solidFill>
+                  <a:srgbClr val="595959"/>
+                </a:solidFill>
+                <a:latin typeface="맑은 고딕"/>
+              </a:rPr>
+              <a:t>· 이용자 건강정보를 다루므로 잠금이 필요하다</a:t>
+            </a:r>
+          </a:p>
+          <a:p>
+            <a:pPr>
+              <a:spcBef>
+                <a:spcPts val="900"/>
+              </a:spcBef>
+              <a:spcAft>
+                <a:spcPts val="200"/>
+              </a:spcAft>
+            </a:pPr>
+            <a:r>
+              <a:rPr sz="1170" b="1">
+                <a:solidFill>
+                  <a:srgbClr val="C0206B"/>
+                </a:solidFill>
+                <a:latin typeface="맑은 고딕"/>
+              </a:rPr>
+              <a:t>알아둘 것</a:t>
+            </a:r>
+          </a:p>
+          <a:p>
+            <a:pPr>
+              <a:spcBef>
+                <a:spcPts val="300"/>
+              </a:spcBef>
+              <a:spcAft>
+                <a:spcPts val="200"/>
+              </a:spcAft>
+            </a:pPr>
+            <a:r>
+              <a:rPr sz="1050" b="0">
+                <a:solidFill>
+                  <a:srgbClr val="595959"/>
+                </a:solidFill>
+                <a:latin typeface="맑은 고딕"/>
+              </a:rPr>
+              <a:t>· PIN 은 pbkdf2-sha256 해시로만 저장 — 사람이 못 읽고 재발급만 된다</a:t>
+            </a:r>
+          </a:p>
+          <a:p>
+            <a:pPr>
+              <a:spcBef>
+                <a:spcPts val="300"/>
+              </a:spcBef>
+              <a:spcAft>
+                <a:spcPts val="200"/>
+              </a:spcAft>
+            </a:pPr>
+            <a:r>
+              <a:rPr sz="1050" b="0">
+                <a:solidFill>
+                  <a:srgbClr val="595959"/>
+                </a:solidFill>
+                <a:latin typeface="맑은 고딕"/>
+              </a:rPr>
+              <a:t>· 시설 안 공용PC 기준의 최소 잠금이다. 인터넷에 공개하려면 이걸로 부족하다(계정·2단계 인증 필요)</a:t>
+            </a:r>
+          </a:p>
+          <a:p>
+            <a:pPr>
+              <a:spcBef>
+                <a:spcPts val="300"/>
+              </a:spcBef>
+              <a:spcAft>
+                <a:spcPts val="200"/>
+              </a:spcAft>
+            </a:pPr>
+            <a:r>
+              <a:rPr sz="1050" b="0">
+                <a:solidFill>
+                  <a:srgbClr val="595959"/>
+                </a:solidFill>
+                <a:latin typeface="맑은 고딕"/>
+              </a:rPr>
+              <a:t>· 데이터는 이 PC 로컬 JSON 뿐이다. 날리면 복구가 안 되니 주기적으로 백업</a:t>
+            </a:r>
+          </a:p>
+        </p:txBody>
+      </p:sp>
     </p:spTree>
   </p:cSld>
   <p:clrMapOvr>
@@ -4585,8 +6066,8 @@
         </p:nvSpPr>
         <p:spPr>
           <a:xfrm>
-            <a:off x="548640" y="384048"/>
-            <a:ext cx="8686800" cy="274320"/>
+            <a:off x="502920" y="347472"/>
+            <a:ext cx="7315200" cy="365760"/>
           </a:xfrm>
           <a:prstGeom prst="rect">
             <a:avLst/>
@@ -4599,6 +6080,14 @@
           </a:bodyPr>
           <a:lstStyle/>
           <a:p>
+            <a:pPr>
+              <a:spcBef>
+                <a:spcPts val="0"/>
+              </a:spcBef>
+              <a:spcAft>
+                <a:spcPts val="200"/>
+              </a:spcAft>
+            </a:pPr>
             <a:r>
               <a:rPr sz="2600" b="1">
                 <a:solidFill>
@@ -4619,8 +6108,8 @@
         </p:nvSpPr>
         <p:spPr>
           <a:xfrm>
-            <a:off x="548640" y="914400"/>
-            <a:ext cx="1463040" cy="28575"/>
+            <a:off x="502920" y="868680"/>
+            <a:ext cx="1280160" cy="28575"/>
           </a:xfrm>
           <a:prstGeom prst="rect">
             <a:avLst/>
@@ -4663,8 +6152,8 @@
         </p:nvSpPr>
         <p:spPr>
           <a:xfrm>
-            <a:off x="548640" y="1024128"/>
-            <a:ext cx="11064240" cy="274320"/>
+            <a:off x="502920" y="969264"/>
+            <a:ext cx="6949440" cy="365760"/>
           </a:xfrm>
           <a:prstGeom prst="rect">
             <a:avLst/>
@@ -4677,14 +6166,22 @@
           </a:bodyPr>
           <a:lstStyle/>
           <a:p>
-            <a:r>
-              <a:rPr sz="1200" b="0">
-                <a:solidFill>
-                  <a:srgbClr val="595959"/>
-                </a:solidFill>
-                <a:latin typeface="맑은 고딕"/>
-              </a:rPr>
-              <a:t>계정별로 기억. 본문 대비 13:1 — 순백은 눈부시고 낮추면 시력 저하자가 못 읽는다</a:t>
+            <a:pPr>
+              <a:spcBef>
+                <a:spcPts val="0"/>
+              </a:spcBef>
+              <a:spcAft>
+                <a:spcPts val="200"/>
+              </a:spcAft>
+            </a:pPr>
+            <a:r>
+              <a:rPr sz="1300" b="0">
+                <a:solidFill>
+                  <a:srgbClr val="1A1A1A"/>
+                </a:solidFill>
+                <a:latin typeface="맑은 고딕"/>
+              </a:rPr>
+              <a:t>밝은 화면이 눈부신 사람을 위해.</a:t>
             </a:r>
           </a:p>
         </p:txBody>
@@ -4705,14 +6202,185 @@
         </p:blipFill>
         <p:spPr>
           <a:xfrm>
-            <a:off x="2575407" y="1463040"/>
-            <a:ext cx="7040880" cy="5029200"/>
+            <a:off x="502920" y="1371600"/>
+            <a:ext cx="6858000" cy="4898571"/>
           </a:xfrm>
           <a:prstGeom prst="rect">
             <a:avLst/>
           </a:prstGeom>
+          <a:ln w="9525">
+            <a:solidFill>
+              <a:srgbClr val="C7C7C7"/>
+            </a:solidFill>
+          </a:ln>
         </p:spPr>
       </p:pic>
+      <p:sp>
+        <p:nvSpPr>
+          <p:cNvPr id="7" name="Rounded Rectangle 6"/>
+          <p:cNvSpPr/>
+          <p:nvPr/>
+        </p:nvSpPr>
+        <p:spPr>
+          <a:xfrm>
+            <a:off x="7589520" y="1371600"/>
+            <a:ext cx="4099255" cy="5029200"/>
+          </a:xfrm>
+          <a:prstGeom prst="roundRect">
+            <a:avLst>
+              <a:gd name="adj" fmla="val 3000"/>
+            </a:avLst>
+          </a:prstGeom>
+          <a:solidFill>
+            <a:srgbClr val="FFFFFF"/>
+          </a:solidFill>
+          <a:ln w="12700">
+            <a:solidFill>
+              <a:srgbClr val="C7C7C7"/>
+            </a:solidFill>
+          </a:ln>
+          <a:effectLst/>
+        </p:spPr>
+        <p:style>
+          <a:lnRef idx="1">
+            <a:schemeClr val="accent1"/>
+          </a:lnRef>
+          <a:fillRef idx="3">
+            <a:schemeClr val="accent1"/>
+          </a:fillRef>
+          <a:effectRef idx="2">
+            <a:schemeClr val="accent1"/>
+          </a:effectRef>
+          <a:fontRef idx="minor">
+            <a:schemeClr val="lt1"/>
+          </a:fontRef>
+        </p:style>
+        <p:txBody>
+          <a:bodyPr rtlCol="0" anchor="ctr"/>
+          <a:lstStyle/>
+          <a:p>
+            <a:pPr algn="ctr"/>
+          </a:p>
+        </p:txBody>
+      </p:sp>
+      <p:sp>
+        <p:nvSpPr>
+          <p:cNvPr id="8" name="TextBox 7"/>
+          <p:cNvSpPr txBox="1"/>
+          <p:nvPr/>
+        </p:nvSpPr>
+        <p:spPr>
+          <a:xfrm>
+            <a:off x="7790688" y="1536192"/>
+            <a:ext cx="3696919" cy="4754880"/>
+          </a:xfrm>
+          <a:prstGeom prst="rect">
+            <a:avLst/>
+          </a:prstGeom>
+          <a:noFill/>
+        </p:spPr>
+        <p:txBody>
+          <a:bodyPr wrap="square" lIns="0" rIns="0" tIns="0" bIns="0">
+            <a:spAutoFit/>
+          </a:bodyPr>
+          <a:lstStyle/>
+          <a:p>
+            <a:pPr>
+              <a:spcBef>
+                <a:spcPts val="0"/>
+              </a:spcBef>
+              <a:spcAft>
+                <a:spcPts val="200"/>
+              </a:spcAft>
+            </a:pPr>
+            <a:r>
+              <a:rPr sz="1170" b="1">
+                <a:solidFill>
+                  <a:srgbClr val="C0206B"/>
+                </a:solidFill>
+                <a:latin typeface="맑은 고딕"/>
+              </a:rPr>
+              <a:t>하는 일</a:t>
+            </a:r>
+          </a:p>
+          <a:p>
+            <a:pPr>
+              <a:spcBef>
+                <a:spcPts val="300"/>
+              </a:spcBef>
+              <a:spcAft>
+                <a:spcPts val="200"/>
+              </a:spcAft>
+            </a:pPr>
+            <a:r>
+              <a:rPr sz="1050" b="0">
+                <a:solidFill>
+                  <a:srgbClr val="1A1A1A"/>
+                </a:solidFill>
+                <a:latin typeface="맑은 고딕"/>
+              </a:rPr>
+              <a:t>· 사이드바 버튼으로 전환. 계정별로 기억한다</a:t>
+            </a:r>
+          </a:p>
+          <a:p>
+            <a:pPr>
+              <a:spcBef>
+                <a:spcPts val="900"/>
+              </a:spcBef>
+              <a:spcAft>
+                <a:spcPts val="200"/>
+              </a:spcAft>
+            </a:pPr>
+            <a:r>
+              <a:rPr sz="1170" b="1">
+                <a:solidFill>
+                  <a:srgbClr val="C0206B"/>
+                </a:solidFill>
+                <a:latin typeface="맑은 고딕"/>
+              </a:rPr>
+              <a:t>알아둘 것</a:t>
+            </a:r>
+          </a:p>
+          <a:p>
+            <a:pPr>
+              <a:spcBef>
+                <a:spcPts val="300"/>
+              </a:spcBef>
+              <a:spcAft>
+                <a:spcPts val="200"/>
+              </a:spcAft>
+            </a:pPr>
+            <a:r>
+              <a:rPr sz="1050" b="0">
+                <a:solidFill>
+                  <a:srgbClr val="595959"/>
+                </a:solidFill>
+                <a:latin typeface="맑은 고딕"/>
+              </a:rPr>
+              <a:t>· 순백 글씨는 눈부시다(18.7:1). 그렇다고 낮추면 시력 저하자가 못 읽는다. → 본문 #DAD7D2 로 13:1 에 맞췄다</a:t>
+            </a:r>
+          </a:p>
+          <a:p>
+            <a:pPr>
+              <a:spcBef>
+                <a:spcPts val="300"/>
+              </a:spcBef>
+              <a:spcAft>
+                <a:spcPts val="200"/>
+              </a:spcAft>
+            </a:pPr>
+            <a:r>
+              <a:rPr sz="1050" b="0">
+                <a:solidFill>
+                  <a:srgbClr val="595959"/>
+                </a:solidFill>
+                <a:latin typeface="맑은 고딕"/>
+              </a:rPr>
+              <a:t>· 인스타그램 원색은 흰 배경에서 대비가 모자란다 (회색 3.3 · 파랑 3.2 · 빨강 3.7 — 본문 기준 4.5). 진한 색으로 바꾸고 원색은 그라디언트 배경에만 남겼다</a:t>
+            </a:r>
+          </a:p>
+        </p:txBody>
+      </p:sp>
     </p:spTree>
   </p:cSld>
   <p:clrMapOvr>
@@ -4783,8 +6451,8 @@
         </p:nvSpPr>
         <p:spPr>
           <a:xfrm>
-            <a:off x="548640" y="384048"/>
-            <a:ext cx="8686800" cy="274320"/>
+            <a:off x="502920" y="347472"/>
+            <a:ext cx="7315200" cy="365760"/>
           </a:xfrm>
           <a:prstGeom prst="rect">
             <a:avLst/>
@@ -4797,6 +6465,14 @@
           </a:bodyPr>
           <a:lstStyle/>
           <a:p>
+            <a:pPr>
+              <a:spcBef>
+                <a:spcPts val="0"/>
+              </a:spcBef>
+              <a:spcAft>
+                <a:spcPts val="200"/>
+              </a:spcAft>
+            </a:pPr>
             <a:r>
               <a:rPr sz="2600" b="1">
                 <a:solidFill>
@@ -4817,8 +6493,8 @@
         </p:nvSpPr>
         <p:spPr>
           <a:xfrm>
-            <a:off x="548640" y="914400"/>
-            <a:ext cx="1463040" cy="28575"/>
+            <a:off x="502920" y="868680"/>
+            <a:ext cx="1280160" cy="28575"/>
           </a:xfrm>
           <a:prstGeom prst="rect">
             <a:avLst/>
@@ -4861,8 +6537,8 @@
         </p:nvSpPr>
         <p:spPr>
           <a:xfrm>
-            <a:off x="548640" y="1024128"/>
-            <a:ext cx="11064240" cy="274320"/>
+            <a:off x="502920" y="969264"/>
+            <a:ext cx="6949440" cy="365760"/>
           </a:xfrm>
           <a:prstGeom prst="rect">
             <a:avLst/>
@@ -4875,14 +6551,22 @@
           </a:bodyPr>
           <a:lstStyle/>
           <a:p>
-            <a:r>
-              <a:rPr sz="1200" b="0">
-                <a:solidFill>
-                  <a:srgbClr val="595959"/>
-                </a:solidFill>
-                <a:latin typeface="맑은 고딕"/>
-              </a:rPr>
-              <a:t>오늘 근무·등원 현황·기한 지난 기록을 한 화면에. 스토리 줄은 등원한 이용자(링 색으로 남은 칸 표시)</a:t>
+            <a:pPr>
+              <a:spcBef>
+                <a:spcPts val="0"/>
+              </a:spcBef>
+              <a:spcAft>
+                <a:spcPts val="200"/>
+              </a:spcAft>
+            </a:pPr>
+            <a:r>
+              <a:rPr sz="1300" b="0">
+                <a:solidFill>
+                  <a:srgbClr val="1A1A1A"/>
+                </a:solidFill>
+                <a:latin typeface="맑은 고딕"/>
+              </a:rPr>
+              <a:t>하루를 열면 오늘 챙길 것이 다 보인다.</a:t>
             </a:r>
           </a:p>
         </p:txBody>
@@ -4903,14 +6587,280 @@
         </p:blipFill>
         <p:spPr>
           <a:xfrm>
-            <a:off x="2575407" y="1463040"/>
-            <a:ext cx="7040880" cy="5029200"/>
+            <a:off x="502920" y="1371600"/>
+            <a:ext cx="6858000" cy="4898571"/>
           </a:xfrm>
           <a:prstGeom prst="rect">
             <a:avLst/>
           </a:prstGeom>
+          <a:ln w="9525">
+            <a:solidFill>
+              <a:srgbClr val="C7C7C7"/>
+            </a:solidFill>
+          </a:ln>
         </p:spPr>
       </p:pic>
+      <p:sp>
+        <p:nvSpPr>
+          <p:cNvPr id="7" name="Rounded Rectangle 6"/>
+          <p:cNvSpPr/>
+          <p:nvPr/>
+        </p:nvSpPr>
+        <p:spPr>
+          <a:xfrm>
+            <a:off x="7589520" y="1371600"/>
+            <a:ext cx="4099255" cy="5029200"/>
+          </a:xfrm>
+          <a:prstGeom prst="roundRect">
+            <a:avLst>
+              <a:gd name="adj" fmla="val 3000"/>
+            </a:avLst>
+          </a:prstGeom>
+          <a:solidFill>
+            <a:srgbClr val="FFFFFF"/>
+          </a:solidFill>
+          <a:ln w="12700">
+            <a:solidFill>
+              <a:srgbClr val="C7C7C7"/>
+            </a:solidFill>
+          </a:ln>
+          <a:effectLst/>
+        </p:spPr>
+        <p:style>
+          <a:lnRef idx="1">
+            <a:schemeClr val="accent1"/>
+          </a:lnRef>
+          <a:fillRef idx="3">
+            <a:schemeClr val="accent1"/>
+          </a:fillRef>
+          <a:effectRef idx="2">
+            <a:schemeClr val="accent1"/>
+          </a:effectRef>
+          <a:fontRef idx="minor">
+            <a:schemeClr val="lt1"/>
+          </a:fontRef>
+        </p:style>
+        <p:txBody>
+          <a:bodyPr rtlCol="0" anchor="ctr"/>
+          <a:lstStyle/>
+          <a:p>
+            <a:pPr algn="ctr"/>
+          </a:p>
+        </p:txBody>
+      </p:sp>
+      <p:sp>
+        <p:nvSpPr>
+          <p:cNvPr id="8" name="TextBox 7"/>
+          <p:cNvSpPr txBox="1"/>
+          <p:nvPr/>
+        </p:nvSpPr>
+        <p:spPr>
+          <a:xfrm>
+            <a:off x="7790688" y="1536192"/>
+            <a:ext cx="3696919" cy="4754880"/>
+          </a:xfrm>
+          <a:prstGeom prst="rect">
+            <a:avLst/>
+          </a:prstGeom>
+          <a:noFill/>
+        </p:spPr>
+        <p:txBody>
+          <a:bodyPr wrap="square" lIns="0" rIns="0" tIns="0" bIns="0">
+            <a:spAutoFit/>
+          </a:bodyPr>
+          <a:lstStyle/>
+          <a:p>
+            <a:pPr>
+              <a:spcBef>
+                <a:spcPts val="0"/>
+              </a:spcBef>
+              <a:spcAft>
+                <a:spcPts val="200"/>
+              </a:spcAft>
+            </a:pPr>
+            <a:r>
+              <a:rPr sz="1170" b="1">
+                <a:solidFill>
+                  <a:srgbClr val="C0206B"/>
+                </a:solidFill>
+                <a:latin typeface="맑은 고딕"/>
+              </a:rPr>
+              <a:t>하는 일</a:t>
+            </a:r>
+          </a:p>
+          <a:p>
+            <a:pPr>
+              <a:spcBef>
+                <a:spcPts val="300"/>
+              </a:spcBef>
+              <a:spcAft>
+                <a:spcPts val="200"/>
+              </a:spcAft>
+            </a:pPr>
+            <a:r>
+              <a:rPr sz="1050" b="0">
+                <a:solidFill>
+                  <a:srgbClr val="1A1A1A"/>
+                </a:solidFill>
+                <a:latin typeface="맑은 고딕"/>
+              </a:rPr>
+              <a:t>· 오늘 근무자·등원 현황을 맨 위에</a:t>
+            </a:r>
+          </a:p>
+          <a:p>
+            <a:pPr>
+              <a:spcBef>
+                <a:spcPts val="300"/>
+              </a:spcBef>
+              <a:spcAft>
+                <a:spcPts val="200"/>
+              </a:spcAft>
+            </a:pPr>
+            <a:r>
+              <a:rPr sz="1050" b="0">
+                <a:solidFill>
+                  <a:srgbClr val="1A1A1A"/>
+                </a:solidFill>
+                <a:latin typeface="맑은 고딕"/>
+              </a:rPr>
+              <a:t>· 스토리 줄 = 오늘 등원한 이용자. 링 색이 상태다 — 그라디언트는 아직 채울 칸 있음, 빨강은 주의사항 있음, 회색은 완료</a:t>
+            </a:r>
+          </a:p>
+          <a:p>
+            <a:pPr>
+              <a:spcBef>
+                <a:spcPts val="300"/>
+              </a:spcBef>
+              <a:spcAft>
+                <a:spcPts val="200"/>
+              </a:spcAft>
+            </a:pPr>
+            <a:r>
+              <a:rPr sz="1050" b="0">
+                <a:solidFill>
+                  <a:srgbClr val="1A1A1A"/>
+                </a:solidFill>
+                <a:latin typeface="맑은 고딕"/>
+              </a:rPr>
+              <a:t>· 숫자 넷: 등원 / 결석 / 출결 미확인 / 서식 빈 칸</a:t>
+            </a:r>
+          </a:p>
+          <a:p>
+            <a:pPr>
+              <a:spcBef>
+                <a:spcPts val="300"/>
+              </a:spcBef>
+              <a:spcAft>
+                <a:spcPts val="200"/>
+              </a:spcAft>
+            </a:pPr>
+            <a:r>
+              <a:rPr sz="1050" b="0">
+                <a:solidFill>
+                  <a:srgbClr val="1A1A1A"/>
+                </a:solidFill>
+                <a:latin typeface="맑은 고딕"/>
+              </a:rPr>
+              <a:t>· 카드로 내려가며 공지 · 기한 지난 기록 · 수급자별 기한 · 손봐야 할 기기 · 오늘 주의 · 안 채운 칸 · 프로그램 · 인계</a:t>
+            </a:r>
+          </a:p>
+          <a:p>
+            <a:pPr>
+              <a:spcBef>
+                <a:spcPts val="900"/>
+              </a:spcBef>
+              <a:spcAft>
+                <a:spcPts val="200"/>
+              </a:spcAft>
+            </a:pPr>
+            <a:r>
+              <a:rPr sz="1170" b="1">
+                <a:solidFill>
+                  <a:srgbClr val="C0206B"/>
+                </a:solidFill>
+                <a:latin typeface="맑은 고딕"/>
+              </a:rPr>
+              <a:t>근거</a:t>
+            </a:r>
+          </a:p>
+          <a:p>
+            <a:pPr>
+              <a:spcBef>
+                <a:spcPts val="300"/>
+              </a:spcBef>
+              <a:spcAft>
+                <a:spcPts val="200"/>
+              </a:spcAft>
+            </a:pPr>
+            <a:r>
+              <a:rPr sz="1050" b="0">
+                <a:solidFill>
+                  <a:srgbClr val="595959"/>
+                </a:solidFill>
+                <a:latin typeface="맑은 고딕"/>
+              </a:rPr>
+              <a:t>· 논문 AS-IS 문제 3 — 기록이 일과 끝에 몰린다</a:t>
+            </a:r>
+          </a:p>
+          <a:p>
+            <a:pPr>
+              <a:spcBef>
+                <a:spcPts val="300"/>
+              </a:spcBef>
+              <a:spcAft>
+                <a:spcPts val="200"/>
+              </a:spcAft>
+            </a:pPr>
+            <a:r>
+              <a:rPr sz="1050" b="0">
+                <a:solidFill>
+                  <a:srgbClr val="595959"/>
+                </a:solidFill>
+                <a:latin typeface="맑은 고딕"/>
+              </a:rPr>
+              <a:t>· 평가지표의 주기를 앱이 세어 홈에서 먼저 알린다</a:t>
+            </a:r>
+          </a:p>
+          <a:p>
+            <a:pPr>
+              <a:spcBef>
+                <a:spcPts val="900"/>
+              </a:spcBef>
+              <a:spcAft>
+                <a:spcPts val="200"/>
+              </a:spcAft>
+            </a:pPr>
+            <a:r>
+              <a:rPr sz="1170" b="1">
+                <a:solidFill>
+                  <a:srgbClr val="C0206B"/>
+                </a:solidFill>
+                <a:latin typeface="맑은 고딕"/>
+              </a:rPr>
+              <a:t>알아둘 것</a:t>
+            </a:r>
+          </a:p>
+          <a:p>
+            <a:pPr>
+              <a:spcBef>
+                <a:spcPts val="300"/>
+              </a:spcBef>
+              <a:spcAft>
+                <a:spcPts val="200"/>
+              </a:spcAft>
+            </a:pPr>
+            <a:r>
+              <a:rPr sz="1050" b="0">
+                <a:solidFill>
+                  <a:srgbClr val="595959"/>
+                </a:solidFill>
+                <a:latin typeface="맑은 고딕"/>
+              </a:rPr>
+              <a:t>· 인스타그램 화면 구성을 따랐다(앱바 → 스토리 → 피드). 현장에서 '무엇부터 볼지' 고민하지 않게 하려는 것</a:t>
+            </a:r>
+          </a:p>
+        </p:txBody>
+      </p:sp>
     </p:spTree>
   </p:cSld>
   <p:clrMapOvr>
@@ -4981,8 +6931,8 @@
         </p:nvSpPr>
         <p:spPr>
           <a:xfrm>
-            <a:off x="548640" y="384048"/>
-            <a:ext cx="8686800" cy="274320"/>
+            <a:off x="502920" y="347472"/>
+            <a:ext cx="7315200" cy="365760"/>
           </a:xfrm>
           <a:prstGeom prst="rect">
             <a:avLst/>
@@ -4995,6 +6945,14 @@
           </a:bodyPr>
           <a:lstStyle/>
           <a:p>
+            <a:pPr>
+              <a:spcBef>
+                <a:spcPts val="0"/>
+              </a:spcBef>
+              <a:spcAft>
+                <a:spcPts val="200"/>
+              </a:spcAft>
+            </a:pPr>
             <a:r>
               <a:rPr sz="2600" b="1">
                 <a:solidFill>
@@ -5015,8 +6973,8 @@
         </p:nvSpPr>
         <p:spPr>
           <a:xfrm>
-            <a:off x="548640" y="914400"/>
-            <a:ext cx="1463040" cy="28575"/>
+            <a:off x="502920" y="868680"/>
+            <a:ext cx="1280160" cy="28575"/>
           </a:xfrm>
           <a:prstGeom prst="rect">
             <a:avLst/>
@@ -5059,8 +7017,8 @@
         </p:nvSpPr>
         <p:spPr>
           <a:xfrm>
-            <a:off x="548640" y="1024128"/>
-            <a:ext cx="11064240" cy="274320"/>
+            <a:off x="502920" y="969264"/>
+            <a:ext cx="6949440" cy="365760"/>
           </a:xfrm>
           <a:prstGeom prst="rect">
             <a:avLst/>
@@ -5073,14 +7031,22 @@
           </a:bodyPr>
           <a:lstStyle/>
           <a:p>
-            <a:r>
-              <a:rPr sz="1200" b="0">
-                <a:solidFill>
-                  <a:srgbClr val="595959"/>
-                </a:solidFill>
-                <a:latin typeface="맑은 고딕"/>
-              </a:rPr>
-              <a:t>별지 제15호서식 그대로. 출결 → 음성 기록 → 서식 채우기. 목욕 분·방법, 식사 종류·섭취량까지</a:t>
+            <a:pPr>
+              <a:spcBef>
+                <a:spcPts val="0"/>
+              </a:spcBef>
+              <a:spcAft>
+                <a:spcPts val="200"/>
+              </a:spcAft>
+            </a:pPr>
+            <a:r>
+              <a:rPr sz="1300" b="0">
+                <a:solidFill>
+                  <a:srgbClr val="1A1A1A"/>
+                </a:solidFill>
+                <a:latin typeface="맑은 고딕"/>
+              </a:rPr>
+              <a:t>급여제공기록지를 현장에서 바로 채운다.</a:t>
             </a:r>
           </a:p>
         </p:txBody>
@@ -5101,14 +7067,318 @@
         </p:blipFill>
         <p:spPr>
           <a:xfrm>
-            <a:off x="2575407" y="1463040"/>
-            <a:ext cx="7040880" cy="5029200"/>
+            <a:off x="502920" y="1371600"/>
+            <a:ext cx="6858000" cy="4898571"/>
           </a:xfrm>
           <a:prstGeom prst="rect">
             <a:avLst/>
           </a:prstGeom>
+          <a:ln w="9525">
+            <a:solidFill>
+              <a:srgbClr val="C7C7C7"/>
+            </a:solidFill>
+          </a:ln>
         </p:spPr>
       </p:pic>
+      <p:sp>
+        <p:nvSpPr>
+          <p:cNvPr id="7" name="Rounded Rectangle 6"/>
+          <p:cNvSpPr/>
+          <p:nvPr/>
+        </p:nvSpPr>
+        <p:spPr>
+          <a:xfrm>
+            <a:off x="7589520" y="1371600"/>
+            <a:ext cx="4099255" cy="5029200"/>
+          </a:xfrm>
+          <a:prstGeom prst="roundRect">
+            <a:avLst>
+              <a:gd name="adj" fmla="val 3000"/>
+            </a:avLst>
+          </a:prstGeom>
+          <a:solidFill>
+            <a:srgbClr val="FFFFFF"/>
+          </a:solidFill>
+          <a:ln w="12700">
+            <a:solidFill>
+              <a:srgbClr val="C7C7C7"/>
+            </a:solidFill>
+          </a:ln>
+          <a:effectLst/>
+        </p:spPr>
+        <p:style>
+          <a:lnRef idx="1">
+            <a:schemeClr val="accent1"/>
+          </a:lnRef>
+          <a:fillRef idx="3">
+            <a:schemeClr val="accent1"/>
+          </a:fillRef>
+          <a:effectRef idx="2">
+            <a:schemeClr val="accent1"/>
+          </a:effectRef>
+          <a:fontRef idx="minor">
+            <a:schemeClr val="lt1"/>
+          </a:fontRef>
+        </p:style>
+        <p:txBody>
+          <a:bodyPr rtlCol="0" anchor="ctr"/>
+          <a:lstStyle/>
+          <a:p>
+            <a:pPr algn="ctr"/>
+          </a:p>
+        </p:txBody>
+      </p:sp>
+      <p:sp>
+        <p:nvSpPr>
+          <p:cNvPr id="8" name="TextBox 7"/>
+          <p:cNvSpPr txBox="1"/>
+          <p:nvPr/>
+        </p:nvSpPr>
+        <p:spPr>
+          <a:xfrm>
+            <a:off x="7790688" y="1536192"/>
+            <a:ext cx="3696919" cy="4754880"/>
+          </a:xfrm>
+          <a:prstGeom prst="rect">
+            <a:avLst/>
+          </a:prstGeom>
+          <a:noFill/>
+        </p:spPr>
+        <p:txBody>
+          <a:bodyPr wrap="square" lIns="0" rIns="0" tIns="0" bIns="0">
+            <a:spAutoFit/>
+          </a:bodyPr>
+          <a:lstStyle/>
+          <a:p>
+            <a:pPr>
+              <a:spcBef>
+                <a:spcPts val="0"/>
+              </a:spcBef>
+              <a:spcAft>
+                <a:spcPts val="200"/>
+              </a:spcAft>
+            </a:pPr>
+            <a:r>
+              <a:rPr sz="1170" b="1">
+                <a:solidFill>
+                  <a:srgbClr val="C0206B"/>
+                </a:solidFill>
+                <a:latin typeface="맑은 고딕"/>
+              </a:rPr>
+              <a:t>하는 일</a:t>
+            </a:r>
+          </a:p>
+          <a:p>
+            <a:pPr>
+              <a:spcBef>
+                <a:spcPts val="300"/>
+              </a:spcBef>
+              <a:spcAft>
+                <a:spcPts val="200"/>
+              </a:spcAft>
+            </a:pPr>
+            <a:r>
+              <a:rPr sz="1050" b="0">
+                <a:solidFill>
+                  <a:srgbClr val="1A1A1A"/>
+                </a:solidFill>
+                <a:latin typeface="맑은 고딕"/>
+              </a:rPr>
+              <a:t>· 출결부터 찍는다(등원/결석/미확인) — 등원한 사람만 아래에 뜬다</a:t>
+            </a:r>
+          </a:p>
+          <a:p>
+            <a:pPr>
+              <a:spcBef>
+                <a:spcPts val="300"/>
+              </a:spcBef>
+              <a:spcAft>
+                <a:spcPts val="200"/>
+              </a:spcAft>
+            </a:pPr>
+            <a:r>
+              <a:rPr sz="1050" b="0">
+                <a:solidFill>
+                  <a:srgbClr val="1A1A1A"/>
+                </a:solidFill>
+                <a:latin typeface="맑은 고딕"/>
+              </a:rPr>
+              <a:t>· 🎤 말해서 기록: 말하면 초안이 뜨고, 확인 후 저장</a:t>
+            </a:r>
+          </a:p>
+          <a:p>
+            <a:pPr>
+              <a:spcBef>
+                <a:spcPts val="300"/>
+              </a:spcBef>
+              <a:spcAft>
+                <a:spcPts val="200"/>
+              </a:spcAft>
+            </a:pPr>
+            <a:r>
+              <a:rPr sz="1050" b="0">
+                <a:solidFill>
+                  <a:srgbClr val="1A1A1A"/>
+                </a:solidFill>
+                <a:latin typeface="맑은 고딕"/>
+              </a:rPr>
+              <a:t>· 급여시간(시작·종료·총시간 자동)과 이동서비스 차량번호</a:t>
+            </a:r>
+          </a:p>
+          <a:p>
+            <a:pPr>
+              <a:spcBef>
+                <a:spcPts val="300"/>
+              </a:spcBef>
+              <a:spcAft>
+                <a:spcPts val="200"/>
+              </a:spcAft>
+            </a:pPr>
+            <a:r>
+              <a:rPr sz="1050" b="0">
+                <a:solidFill>
+                  <a:srgbClr val="1A1A1A"/>
+                </a:solidFill>
+                <a:latin typeface="맑은 고딕"/>
+              </a:rPr>
+              <a:t>· 3구역 12항목: 신체활동지원 · 간호 및 처치 · 기능회복훈련</a:t>
+            </a:r>
+          </a:p>
+          <a:p>
+            <a:pPr>
+              <a:spcBef>
+                <a:spcPts val="300"/>
+              </a:spcBef>
+              <a:spcAft>
+                <a:spcPts val="200"/>
+              </a:spcAft>
+            </a:pPr>
+            <a:r>
+              <a:rPr sz="1050" b="0">
+                <a:solidFill>
+                  <a:srgbClr val="1A1A1A"/>
+                </a:solidFill>
+                <a:latin typeface="맑은 고딕"/>
+              </a:rPr>
+              <a:t>· 구역마다 특이사항과 작성자를 따로 남긴다</a:t>
+            </a:r>
+          </a:p>
+          <a:p>
+            <a:pPr>
+              <a:spcBef>
+                <a:spcPts val="900"/>
+              </a:spcBef>
+              <a:spcAft>
+                <a:spcPts val="200"/>
+              </a:spcAft>
+            </a:pPr>
+            <a:r>
+              <a:rPr sz="1170" b="1">
+                <a:solidFill>
+                  <a:srgbClr val="C0206B"/>
+                </a:solidFill>
+                <a:latin typeface="맑은 고딕"/>
+              </a:rPr>
+              <a:t>근거</a:t>
+            </a:r>
+          </a:p>
+          <a:p>
+            <a:pPr>
+              <a:spcBef>
+                <a:spcPts val="300"/>
+              </a:spcBef>
+              <a:spcAft>
+                <a:spcPts val="200"/>
+              </a:spcAft>
+            </a:pPr>
+            <a:r>
+              <a:rPr sz="1050" b="0">
+                <a:solidFill>
+                  <a:srgbClr val="595959"/>
+                </a:solidFill>
+                <a:latin typeface="맑은 고딕"/>
+              </a:rPr>
+              <a:t>· 시행규칙 별지 제15호서식 급여제공기록지(주·야간보호), 개정 2019.9.27</a:t>
+            </a:r>
+          </a:p>
+          <a:p>
+            <a:pPr>
+              <a:spcBef>
+                <a:spcPts val="300"/>
+              </a:spcBef>
+              <a:spcAft>
+                <a:spcPts val="200"/>
+              </a:spcAft>
+            </a:pPr>
+            <a:r>
+              <a:rPr sz="1050" b="0">
+                <a:solidFill>
+                  <a:srgbClr val="595959"/>
+                </a:solidFill>
+                <a:latin typeface="맑은 고딕"/>
+              </a:rPr>
+              <a:t>· 서식 유의사항 반영 — 화장실은 총 횟수(기저귀는 교환 횟수), 목욕은 소요시간+방법, 식사는 종류+섭취량, 프로그램은 프로그램명</a:t>
+            </a:r>
+          </a:p>
+          <a:p>
+            <a:pPr>
+              <a:spcBef>
+                <a:spcPts val="900"/>
+              </a:spcBef>
+              <a:spcAft>
+                <a:spcPts val="200"/>
+              </a:spcAft>
+            </a:pPr>
+            <a:r>
+              <a:rPr sz="1170" b="1">
+                <a:solidFill>
+                  <a:srgbClr val="C0206B"/>
+                </a:solidFill>
+                <a:latin typeface="맑은 고딕"/>
+              </a:rPr>
+              <a:t>알아둘 것</a:t>
+            </a:r>
+          </a:p>
+          <a:p>
+            <a:pPr>
+              <a:spcBef>
+                <a:spcPts val="300"/>
+              </a:spcBef>
+              <a:spcAft>
+                <a:spcPts val="200"/>
+              </a:spcAft>
+            </a:pPr>
+            <a:r>
+              <a:rPr sz="1050" b="0">
+                <a:solidFill>
+                  <a:srgbClr val="595959"/>
+                </a:solidFill>
+                <a:latin typeface="맑은 고딕"/>
+              </a:rPr>
+              <a:t>· 자동 확정 저장이 없다. 음성이든 화면이든 사람이 눌러야 저장된다</a:t>
+            </a:r>
+          </a:p>
+          <a:p>
+            <a:pPr>
+              <a:spcBef>
+                <a:spcPts val="300"/>
+              </a:spcBef>
+              <a:spcAft>
+                <a:spcPts val="200"/>
+              </a:spcAft>
+            </a:pPr>
+            <a:r>
+              <a:rPr sz="1050" b="0">
+                <a:solidFill>
+                  <a:srgbClr val="595959"/>
+                </a:solidFill>
+                <a:latin typeface="맑은 고딕"/>
+              </a:rPr>
+              <a:t>· 누가 언제 무엇을 음성/화면 중 무엇으로 넣었는지 따로 쌓는다(감사 기록)</a:t>
+            </a:r>
+          </a:p>
+        </p:txBody>
+      </p:sp>
     </p:spTree>
   </p:cSld>
   <p:clrMapOvr>
@@ -5179,8 +7449,8 @@
         </p:nvSpPr>
         <p:spPr>
           <a:xfrm>
-            <a:off x="548640" y="384048"/>
-            <a:ext cx="8686800" cy="274320"/>
+            <a:off x="502920" y="347472"/>
+            <a:ext cx="7315200" cy="365760"/>
           </a:xfrm>
           <a:prstGeom prst="rect">
             <a:avLst/>
@@ -5193,6 +7463,14 @@
           </a:bodyPr>
           <a:lstStyle/>
           <a:p>
+            <a:pPr>
+              <a:spcBef>
+                <a:spcPts val="0"/>
+              </a:spcBef>
+              <a:spcAft>
+                <a:spcPts val="200"/>
+              </a:spcAft>
+            </a:pPr>
             <a:r>
               <a:rPr sz="2600" b="1">
                 <a:solidFill>
@@ -5213,8 +7491,8 @@
         </p:nvSpPr>
         <p:spPr>
           <a:xfrm>
-            <a:off x="548640" y="914400"/>
-            <a:ext cx="1463040" cy="28575"/>
+            <a:off x="502920" y="868680"/>
+            <a:ext cx="1280160" cy="28575"/>
           </a:xfrm>
           <a:prstGeom prst="rect">
             <a:avLst/>
@@ -5257,8 +7535,8 @@
         </p:nvSpPr>
         <p:spPr>
           <a:xfrm>
-            <a:off x="548640" y="1024128"/>
-            <a:ext cx="11064240" cy="274320"/>
+            <a:off x="502920" y="969264"/>
+            <a:ext cx="6949440" cy="365760"/>
           </a:xfrm>
           <a:prstGeom prst="rect">
             <a:avLst/>
@@ -5271,14 +7549,22 @@
           </a:bodyPr>
           <a:lstStyle/>
           <a:p>
-            <a:r>
-              <a:rPr sz="1200" b="0">
-                <a:solidFill>
-                  <a:srgbClr val="595959"/>
-                </a:solidFill>
-                <a:latin typeface="맑은 고딕"/>
-              </a:rPr>
-              <a:t>다음 교대가 알아야 할 것. 누가 확인했는지 남는다 (논문 문제2)</a:t>
+            <a:pPr>
+              <a:spcBef>
+                <a:spcPts val="0"/>
+              </a:spcBef>
+              <a:spcAft>
+                <a:spcPts val="200"/>
+              </a:spcAft>
+            </a:pPr>
+            <a:r>
+              <a:rPr sz="1300" b="0">
+                <a:solidFill>
+                  <a:srgbClr val="1A1A1A"/>
+                </a:solidFill>
+                <a:latin typeface="맑은 고딕"/>
+              </a:rPr>
+              <a:t>다음 교대가 알아야 할 것을 기억에 의존하지 않게.</a:t>
             </a:r>
           </a:p>
         </p:txBody>
@@ -5299,14 +7585,242 @@
         </p:blipFill>
         <p:spPr>
           <a:xfrm>
-            <a:off x="2575407" y="1463040"/>
-            <a:ext cx="7040880" cy="5029200"/>
+            <a:off x="502920" y="1371600"/>
+            <a:ext cx="6858000" cy="4898571"/>
           </a:xfrm>
           <a:prstGeom prst="rect">
             <a:avLst/>
           </a:prstGeom>
+          <a:ln w="9525">
+            <a:solidFill>
+              <a:srgbClr val="C7C7C7"/>
+            </a:solidFill>
+          </a:ln>
         </p:spPr>
       </p:pic>
+      <p:sp>
+        <p:nvSpPr>
+          <p:cNvPr id="7" name="Rounded Rectangle 6"/>
+          <p:cNvSpPr/>
+          <p:nvPr/>
+        </p:nvSpPr>
+        <p:spPr>
+          <a:xfrm>
+            <a:off x="7589520" y="1371600"/>
+            <a:ext cx="4099255" cy="5029200"/>
+          </a:xfrm>
+          <a:prstGeom prst="roundRect">
+            <a:avLst>
+              <a:gd name="adj" fmla="val 3000"/>
+            </a:avLst>
+          </a:prstGeom>
+          <a:solidFill>
+            <a:srgbClr val="FFFFFF"/>
+          </a:solidFill>
+          <a:ln w="12700">
+            <a:solidFill>
+              <a:srgbClr val="C7C7C7"/>
+            </a:solidFill>
+          </a:ln>
+          <a:effectLst/>
+        </p:spPr>
+        <p:style>
+          <a:lnRef idx="1">
+            <a:schemeClr val="accent1"/>
+          </a:lnRef>
+          <a:fillRef idx="3">
+            <a:schemeClr val="accent1"/>
+          </a:fillRef>
+          <a:effectRef idx="2">
+            <a:schemeClr val="accent1"/>
+          </a:effectRef>
+          <a:fontRef idx="minor">
+            <a:schemeClr val="lt1"/>
+          </a:fontRef>
+        </p:style>
+        <p:txBody>
+          <a:bodyPr rtlCol="0" anchor="ctr"/>
+          <a:lstStyle/>
+          <a:p>
+            <a:pPr algn="ctr"/>
+          </a:p>
+        </p:txBody>
+      </p:sp>
+      <p:sp>
+        <p:nvSpPr>
+          <p:cNvPr id="8" name="TextBox 7"/>
+          <p:cNvSpPr txBox="1"/>
+          <p:nvPr/>
+        </p:nvSpPr>
+        <p:spPr>
+          <a:xfrm>
+            <a:off x="7790688" y="1536192"/>
+            <a:ext cx="3696919" cy="4754880"/>
+          </a:xfrm>
+          <a:prstGeom prst="rect">
+            <a:avLst/>
+          </a:prstGeom>
+          <a:noFill/>
+        </p:spPr>
+        <p:txBody>
+          <a:bodyPr wrap="square" lIns="0" rIns="0" tIns="0" bIns="0">
+            <a:spAutoFit/>
+          </a:bodyPr>
+          <a:lstStyle/>
+          <a:p>
+            <a:pPr>
+              <a:spcBef>
+                <a:spcPts val="0"/>
+              </a:spcBef>
+              <a:spcAft>
+                <a:spcPts val="200"/>
+              </a:spcAft>
+            </a:pPr>
+            <a:r>
+              <a:rPr sz="1170" b="1">
+                <a:solidFill>
+                  <a:srgbClr val="C0206B"/>
+                </a:solidFill>
+                <a:latin typeface="맑은 고딕"/>
+              </a:rPr>
+              <a:t>하는 일</a:t>
+            </a:r>
+          </a:p>
+          <a:p>
+            <a:pPr>
+              <a:spcBef>
+                <a:spcPts val="300"/>
+              </a:spcBef>
+              <a:spcAft>
+                <a:spcPts val="200"/>
+              </a:spcAft>
+            </a:pPr>
+            <a:r>
+              <a:rPr sz="1050" b="0">
+                <a:solidFill>
+                  <a:srgbClr val="1A1A1A"/>
+                </a:solidFill>
+                <a:latin typeface="맑은 고딕"/>
+              </a:rPr>
+              <a:t>· 이용자 + 종류(건강 / 정서·행동 / 가족 연락 / 기기·환경 / 기타) + 내용</a:t>
+            </a:r>
+          </a:p>
+          <a:p>
+            <a:pPr>
+              <a:spcBef>
+                <a:spcPts val="300"/>
+              </a:spcBef>
+              <a:spcAft>
+                <a:spcPts val="200"/>
+              </a:spcAft>
+            </a:pPr>
+            <a:r>
+              <a:rPr sz="1050" b="0">
+                <a:solidFill>
+                  <a:srgbClr val="1A1A1A"/>
+                </a:solidFill>
+                <a:latin typeface="맑은 고딕"/>
+              </a:rPr>
+              <a:t>· 받은 사람이 '확인함'을 누르면 누가 언제 봤는지 남는다</a:t>
+            </a:r>
+          </a:p>
+          <a:p>
+            <a:pPr>
+              <a:spcBef>
+                <a:spcPts val="300"/>
+              </a:spcBef>
+              <a:spcAft>
+                <a:spcPts val="200"/>
+              </a:spcAft>
+            </a:pPr>
+            <a:r>
+              <a:rPr sz="1050" b="0">
+                <a:solidFill>
+                  <a:srgbClr val="1A1A1A"/>
+                </a:solidFill>
+                <a:latin typeface="맑은 고딕"/>
+              </a:rPr>
+              <a:t>· 홈과 일지에도 함께 뜬다</a:t>
+            </a:r>
+          </a:p>
+          <a:p>
+            <a:pPr>
+              <a:spcBef>
+                <a:spcPts val="900"/>
+              </a:spcBef>
+              <a:spcAft>
+                <a:spcPts val="200"/>
+              </a:spcAft>
+            </a:pPr>
+            <a:r>
+              <a:rPr sz="1170" b="1">
+                <a:solidFill>
+                  <a:srgbClr val="C0206B"/>
+                </a:solidFill>
+                <a:latin typeface="맑은 고딕"/>
+              </a:rPr>
+              <a:t>근거</a:t>
+            </a:r>
+          </a:p>
+          <a:p>
+            <a:pPr>
+              <a:spcBef>
+                <a:spcPts val="300"/>
+              </a:spcBef>
+              <a:spcAft>
+                <a:spcPts val="200"/>
+              </a:spcAft>
+            </a:pPr>
+            <a:r>
+              <a:rPr sz="1050" b="0">
+                <a:solidFill>
+                  <a:srgbClr val="595959"/>
+                </a:solidFill>
+                <a:latin typeface="맑은 고딕"/>
+              </a:rPr>
+              <a:t>· 논문 AS-IS 문제 2 — 정서·인지 부담, 인계가 사람 머릿속에만 있다</a:t>
+            </a:r>
+          </a:p>
+          <a:p>
+            <a:pPr>
+              <a:spcBef>
+                <a:spcPts val="900"/>
+              </a:spcBef>
+              <a:spcAft>
+                <a:spcPts val="200"/>
+              </a:spcAft>
+            </a:pPr>
+            <a:r>
+              <a:rPr sz="1170" b="1">
+                <a:solidFill>
+                  <a:srgbClr val="C0206B"/>
+                </a:solidFill>
+                <a:latin typeface="맑은 고딕"/>
+              </a:rPr>
+              <a:t>알아둘 것</a:t>
+            </a:r>
+          </a:p>
+          <a:p>
+            <a:pPr>
+              <a:spcBef>
+                <a:spcPts val="300"/>
+              </a:spcBef>
+              <a:spcAft>
+                <a:spcPts val="200"/>
+              </a:spcAft>
+            </a:pPr>
+            <a:r>
+              <a:rPr sz="1050" b="0">
+                <a:solidFill>
+                  <a:srgbClr val="595959"/>
+                </a:solidFill>
+                <a:latin typeface="맑은 고딕"/>
+              </a:rPr>
+              <a:t>· 음성으로 말했는데 서식 항목이 아니면(예: "기분이 안 좋으세요") 케어 기록에서 '인계로 넘기기'로 보낼 수 있다</a:t>
+            </a:r>
+          </a:p>
+        </p:txBody>
+      </p:sp>
     </p:spTree>
   </p:cSld>
   <p:clrMapOvr>
@@ -5377,8 +7891,8 @@
         </p:nvSpPr>
         <p:spPr>
           <a:xfrm>
-            <a:off x="548640" y="384048"/>
-            <a:ext cx="8686800" cy="274320"/>
+            <a:off x="502920" y="347472"/>
+            <a:ext cx="7315200" cy="365760"/>
           </a:xfrm>
           <a:prstGeom prst="rect">
             <a:avLst/>
@@ -5391,6 +7905,14 @@
           </a:bodyPr>
           <a:lstStyle/>
           <a:p>
+            <a:pPr>
+              <a:spcBef>
+                <a:spcPts val="0"/>
+              </a:spcBef>
+              <a:spcAft>
+                <a:spcPts val="200"/>
+              </a:spcAft>
+            </a:pPr>
             <a:r>
               <a:rPr sz="2600" b="1">
                 <a:solidFill>
@@ -5411,8 +7933,8 @@
         </p:nvSpPr>
         <p:spPr>
           <a:xfrm>
-            <a:off x="548640" y="914400"/>
-            <a:ext cx="1463040" cy="28575"/>
+            <a:off x="502920" y="868680"/>
+            <a:ext cx="1280160" cy="28575"/>
           </a:xfrm>
           <a:prstGeom prst="rect">
             <a:avLst/>
@@ -5455,8 +7977,8 @@
         </p:nvSpPr>
         <p:spPr>
           <a:xfrm>
-            <a:off x="548640" y="1024128"/>
-            <a:ext cx="11064240" cy="274320"/>
+            <a:off x="502920" y="969264"/>
+            <a:ext cx="6949440" cy="365760"/>
           </a:xfrm>
           <a:prstGeom prst="rect">
             <a:avLst/>
@@ -5469,14 +7991,22 @@
           </a:bodyPr>
           <a:lstStyle/>
           <a:p>
-            <a:r>
-              <a:rPr sz="1200" b="0">
-                <a:solidFill>
-                  <a:srgbClr val="595959"/>
-                </a:solidFill>
-                <a:latin typeface="맑은 고딕"/>
-              </a:rPr>
-              <a:t>하루 기록을 이용자별로 모음 + 보호자 알림장 자동 생성 + 월간 CSV</a:t>
+            <a:pPr>
+              <a:spcBef>
+                <a:spcPts val="0"/>
+              </a:spcBef>
+              <a:spcAft>
+                <a:spcPts val="200"/>
+              </a:spcAft>
+            </a:pPr>
+            <a:r>
+              <a:rPr sz="1300" b="0">
+                <a:solidFill>
+                  <a:srgbClr val="1A1A1A"/>
+                </a:solidFill>
+                <a:latin typeface="맑은 고딕"/>
+              </a:rPr>
+              <a:t>하루 기록을 모으고, 보호자 알림장까지 만든다.</a:t>
             </a:r>
           </a:p>
         </p:txBody>
@@ -5497,14 +8027,242 @@
         </p:blipFill>
         <p:spPr>
           <a:xfrm>
-            <a:off x="2575407" y="1463040"/>
-            <a:ext cx="7040880" cy="5029200"/>
+            <a:off x="502920" y="1371600"/>
+            <a:ext cx="6858000" cy="4898571"/>
           </a:xfrm>
           <a:prstGeom prst="rect">
             <a:avLst/>
           </a:prstGeom>
+          <a:ln w="9525">
+            <a:solidFill>
+              <a:srgbClr val="C7C7C7"/>
+            </a:solidFill>
+          </a:ln>
         </p:spPr>
       </p:pic>
+      <p:sp>
+        <p:nvSpPr>
+          <p:cNvPr id="7" name="Rounded Rectangle 6"/>
+          <p:cNvSpPr/>
+          <p:nvPr/>
+        </p:nvSpPr>
+        <p:spPr>
+          <a:xfrm>
+            <a:off x="7589520" y="1371600"/>
+            <a:ext cx="4099255" cy="5029200"/>
+          </a:xfrm>
+          <a:prstGeom prst="roundRect">
+            <a:avLst>
+              <a:gd name="adj" fmla="val 3000"/>
+            </a:avLst>
+          </a:prstGeom>
+          <a:solidFill>
+            <a:srgbClr val="FFFFFF"/>
+          </a:solidFill>
+          <a:ln w="12700">
+            <a:solidFill>
+              <a:srgbClr val="C7C7C7"/>
+            </a:solidFill>
+          </a:ln>
+          <a:effectLst/>
+        </p:spPr>
+        <p:style>
+          <a:lnRef idx="1">
+            <a:schemeClr val="accent1"/>
+          </a:lnRef>
+          <a:fillRef idx="3">
+            <a:schemeClr val="accent1"/>
+          </a:fillRef>
+          <a:effectRef idx="2">
+            <a:schemeClr val="accent1"/>
+          </a:effectRef>
+          <a:fontRef idx="minor">
+            <a:schemeClr val="lt1"/>
+          </a:fontRef>
+        </p:style>
+        <p:txBody>
+          <a:bodyPr rtlCol="0" anchor="ctr"/>
+          <a:lstStyle/>
+          <a:p>
+            <a:pPr algn="ctr"/>
+          </a:p>
+        </p:txBody>
+      </p:sp>
+      <p:sp>
+        <p:nvSpPr>
+          <p:cNvPr id="8" name="TextBox 7"/>
+          <p:cNvSpPr txBox="1"/>
+          <p:nvPr/>
+        </p:nvSpPr>
+        <p:spPr>
+          <a:xfrm>
+            <a:off x="7790688" y="1536192"/>
+            <a:ext cx="3696919" cy="4754880"/>
+          </a:xfrm>
+          <a:prstGeom prst="rect">
+            <a:avLst/>
+          </a:prstGeom>
+          <a:noFill/>
+        </p:spPr>
+        <p:txBody>
+          <a:bodyPr wrap="square" lIns="0" rIns="0" tIns="0" bIns="0">
+            <a:spAutoFit/>
+          </a:bodyPr>
+          <a:lstStyle/>
+          <a:p>
+            <a:pPr>
+              <a:spcBef>
+                <a:spcPts val="0"/>
+              </a:spcBef>
+              <a:spcAft>
+                <a:spcPts val="200"/>
+              </a:spcAft>
+            </a:pPr>
+            <a:r>
+              <a:rPr sz="1170" b="1">
+                <a:solidFill>
+                  <a:srgbClr val="C0206B"/>
+                </a:solidFill>
+                <a:latin typeface="맑은 고딕"/>
+              </a:rPr>
+              <a:t>하는 일</a:t>
+            </a:r>
+          </a:p>
+          <a:p>
+            <a:pPr>
+              <a:spcBef>
+                <a:spcPts val="300"/>
+              </a:spcBef>
+              <a:spcAft>
+                <a:spcPts val="200"/>
+              </a:spcAft>
+            </a:pPr>
+            <a:r>
+              <a:rPr sz="1050" b="0">
+                <a:solidFill>
+                  <a:srgbClr val="1A1A1A"/>
+                </a:solidFill>
+                <a:latin typeface="맑은 고딕"/>
+              </a:rPr>
+              <a:t>· 이용자별로 그날 서식·인계를 시간순으로 묶어 보여준다</a:t>
+            </a:r>
+          </a:p>
+          <a:p>
+            <a:pPr>
+              <a:spcBef>
+                <a:spcPts val="300"/>
+              </a:spcBef>
+              <a:spcAft>
+                <a:spcPts val="200"/>
+              </a:spcAft>
+            </a:pPr>
+            <a:r>
+              <a:rPr sz="1050" b="0">
+                <a:solidFill>
+                  <a:srgbClr val="1A1A1A"/>
+                </a:solidFill>
+                <a:latin typeface="맑은 고딕"/>
+              </a:rPr>
+              <a:t>· 보호자 알림장: 적어 둔 기록에서 문장을 자동으로 만든다</a:t>
+            </a:r>
+          </a:p>
+          <a:p>
+            <a:pPr>
+              <a:spcBef>
+                <a:spcPts val="300"/>
+              </a:spcBef>
+              <a:spcAft>
+                <a:spcPts val="200"/>
+              </a:spcAft>
+            </a:pPr>
+            <a:r>
+              <a:rPr sz="1050" b="0">
+                <a:solidFill>
+                  <a:srgbClr val="1A1A1A"/>
+                </a:solidFill>
+                <a:latin typeface="맑은 고딕"/>
+              </a:rPr>
+              <a:t>· 월간 내보내기: 한 달치 급여제공기록지를 CSV 로(엑셀에서 바로 열림)</a:t>
+            </a:r>
+          </a:p>
+          <a:p>
+            <a:pPr>
+              <a:spcBef>
+                <a:spcPts val="900"/>
+              </a:spcBef>
+              <a:spcAft>
+                <a:spcPts val="200"/>
+              </a:spcAft>
+            </a:pPr>
+            <a:r>
+              <a:rPr sz="1170" b="1">
+                <a:solidFill>
+                  <a:srgbClr val="C0206B"/>
+                </a:solidFill>
+                <a:latin typeface="맑은 고딕"/>
+              </a:rPr>
+              <a:t>근거</a:t>
+            </a:r>
+          </a:p>
+          <a:p>
+            <a:pPr>
+              <a:spcBef>
+                <a:spcPts val="300"/>
+              </a:spcBef>
+              <a:spcAft>
+                <a:spcPts val="200"/>
+              </a:spcAft>
+            </a:pPr>
+            <a:r>
+              <a:rPr sz="1050" b="0">
+                <a:solidFill>
+                  <a:srgbClr val="595959"/>
+                </a:solidFill>
+                <a:latin typeface="맑은 고딕"/>
+              </a:rPr>
+              <a:t>· 평가 대응·공단 제출 때 한 달치를 한 번에 뽑기 위함</a:t>
+            </a:r>
+          </a:p>
+          <a:p>
+            <a:pPr>
+              <a:spcBef>
+                <a:spcPts val="900"/>
+              </a:spcBef>
+              <a:spcAft>
+                <a:spcPts val="200"/>
+              </a:spcAft>
+            </a:pPr>
+            <a:r>
+              <a:rPr sz="1170" b="1">
+                <a:solidFill>
+                  <a:srgbClr val="C0206B"/>
+                </a:solidFill>
+                <a:latin typeface="맑은 고딕"/>
+              </a:rPr>
+              <a:t>알아둘 것</a:t>
+            </a:r>
+          </a:p>
+          <a:p>
+            <a:pPr>
+              <a:spcBef>
+                <a:spcPts val="300"/>
+              </a:spcBef>
+              <a:spcAft>
+                <a:spcPts val="200"/>
+              </a:spcAft>
+            </a:pPr>
+            <a:r>
+              <a:rPr sz="1050" b="0">
+                <a:solidFill>
+                  <a:srgbClr val="595959"/>
+                </a:solidFill>
+                <a:latin typeface="맑은 고딕"/>
+              </a:rPr>
+              <a:t>· 보호자에게 보내는 기능은 일부러 안 넣었다. 자동 발송하면 잘못 들어간 기록이 그대로 나간다. 문장만 만들고 사람이 읽어본 뒤 문자·카톡으로 보낸다</a:t>
+            </a:r>
+          </a:p>
+        </p:txBody>
+      </p:sp>
     </p:spTree>
   </p:cSld>
   <p:clrMapOvr>
@@ -5575,8 +8333,8 @@
         </p:nvSpPr>
         <p:spPr>
           <a:xfrm>
-            <a:off x="548640" y="384048"/>
-            <a:ext cx="8686800" cy="274320"/>
+            <a:off x="502920" y="347472"/>
+            <a:ext cx="7315200" cy="365760"/>
           </a:xfrm>
           <a:prstGeom prst="rect">
             <a:avLst/>
@@ -5589,6 +8347,14 @@
           </a:bodyPr>
           <a:lstStyle/>
           <a:p>
+            <a:pPr>
+              <a:spcBef>
+                <a:spcPts val="0"/>
+              </a:spcBef>
+              <a:spcAft>
+                <a:spcPts val="200"/>
+              </a:spcAft>
+            </a:pPr>
             <a:r>
               <a:rPr sz="2600" b="1">
                 <a:solidFill>
@@ -5609,8 +8375,8 @@
         </p:nvSpPr>
         <p:spPr>
           <a:xfrm>
-            <a:off x="548640" y="914400"/>
-            <a:ext cx="1463040" cy="28575"/>
+            <a:off x="502920" y="868680"/>
+            <a:ext cx="1280160" cy="28575"/>
           </a:xfrm>
           <a:prstGeom prst="rect">
             <a:avLst/>
@@ -5653,8 +8419,8 @@
         </p:nvSpPr>
         <p:spPr>
           <a:xfrm>
-            <a:off x="548640" y="1024128"/>
-            <a:ext cx="11064240" cy="274320"/>
+            <a:off x="502920" y="969264"/>
+            <a:ext cx="6949440" cy="365760"/>
           </a:xfrm>
           <a:prstGeom prst="rect">
             <a:avLst/>
@@ -5667,14 +8433,22 @@
           </a:bodyPr>
           <a:lstStyle/>
           <a:p>
-            <a:r>
-              <a:rPr sz="1200" b="0">
-                <a:solidFill>
-                  <a:srgbClr val="595959"/>
-                </a:solidFill>
-                <a:latin typeface="맑은 고딕"/>
-              </a:rPr>
-              <a:t>욕구사정 9항목(지표30) · 상담 분기(지표25) · 결과평가 반기(지표44)</a:t>
+            <a:pPr>
+              <a:spcBef>
+                <a:spcPts val="0"/>
+              </a:spcBef>
+              <a:spcAft>
+                <a:spcPts val="200"/>
+              </a:spcAft>
+            </a:pPr>
+            <a:r>
+              <a:rPr sz="1300" b="0">
+                <a:solidFill>
+                  <a:srgbClr val="1A1A1A"/>
+                </a:solidFill>
+                <a:latin typeface="맑은 고딕"/>
+              </a:rPr>
+              <a:t>연 1회·분기·반기로 돌아오는 것들을 한 화면에.</a:t>
             </a:r>
           </a:p>
         </p:txBody>
@@ -5695,14 +8469,318 @@
         </p:blipFill>
         <p:spPr>
           <a:xfrm>
-            <a:off x="2575407" y="1463040"/>
-            <a:ext cx="7040880" cy="5029200"/>
+            <a:off x="502920" y="1371600"/>
+            <a:ext cx="6858000" cy="4898571"/>
           </a:xfrm>
           <a:prstGeom prst="rect">
             <a:avLst/>
           </a:prstGeom>
+          <a:ln w="9525">
+            <a:solidFill>
+              <a:srgbClr val="C7C7C7"/>
+            </a:solidFill>
+          </a:ln>
         </p:spPr>
       </p:pic>
+      <p:sp>
+        <p:nvSpPr>
+          <p:cNvPr id="7" name="Rounded Rectangle 6"/>
+          <p:cNvSpPr/>
+          <p:nvPr/>
+        </p:nvSpPr>
+        <p:spPr>
+          <a:xfrm>
+            <a:off x="7589520" y="1371600"/>
+            <a:ext cx="4099255" cy="5029200"/>
+          </a:xfrm>
+          <a:prstGeom prst="roundRect">
+            <a:avLst>
+              <a:gd name="adj" fmla="val 3000"/>
+            </a:avLst>
+          </a:prstGeom>
+          <a:solidFill>
+            <a:srgbClr val="FFFFFF"/>
+          </a:solidFill>
+          <a:ln w="12700">
+            <a:solidFill>
+              <a:srgbClr val="C7C7C7"/>
+            </a:solidFill>
+          </a:ln>
+          <a:effectLst/>
+        </p:spPr>
+        <p:style>
+          <a:lnRef idx="1">
+            <a:schemeClr val="accent1"/>
+          </a:lnRef>
+          <a:fillRef idx="3">
+            <a:schemeClr val="accent1"/>
+          </a:fillRef>
+          <a:effectRef idx="2">
+            <a:schemeClr val="accent1"/>
+          </a:effectRef>
+          <a:fontRef idx="minor">
+            <a:schemeClr val="lt1"/>
+          </a:fontRef>
+        </p:style>
+        <p:txBody>
+          <a:bodyPr rtlCol="0" anchor="ctr"/>
+          <a:lstStyle/>
+          <a:p>
+            <a:pPr algn="ctr"/>
+          </a:p>
+        </p:txBody>
+      </p:sp>
+      <p:sp>
+        <p:nvSpPr>
+          <p:cNvPr id="8" name="TextBox 7"/>
+          <p:cNvSpPr txBox="1"/>
+          <p:nvPr/>
+        </p:nvSpPr>
+        <p:spPr>
+          <a:xfrm>
+            <a:off x="7790688" y="1536192"/>
+            <a:ext cx="3696919" cy="4754880"/>
+          </a:xfrm>
+          <a:prstGeom prst="rect">
+            <a:avLst/>
+          </a:prstGeom>
+          <a:noFill/>
+        </p:spPr>
+        <p:txBody>
+          <a:bodyPr wrap="square" lIns="0" rIns="0" tIns="0" bIns="0">
+            <a:spAutoFit/>
+          </a:bodyPr>
+          <a:lstStyle/>
+          <a:p>
+            <a:pPr>
+              <a:spcBef>
+                <a:spcPts val="0"/>
+              </a:spcBef>
+              <a:spcAft>
+                <a:spcPts val="200"/>
+              </a:spcAft>
+            </a:pPr>
+            <a:r>
+              <a:rPr sz="1170" b="1">
+                <a:solidFill>
+                  <a:srgbClr val="C0206B"/>
+                </a:solidFill>
+                <a:latin typeface="맑은 고딕"/>
+              </a:rPr>
+              <a:t>하는 일</a:t>
+            </a:r>
+          </a:p>
+          <a:p>
+            <a:pPr>
+              <a:spcBef>
+                <a:spcPts val="300"/>
+              </a:spcBef>
+              <a:spcAft>
+                <a:spcPts val="200"/>
+              </a:spcAft>
+            </a:pPr>
+            <a:r>
+              <a:rPr sz="1050" b="0">
+                <a:solidFill>
+                  <a:srgbClr val="1A1A1A"/>
+                </a:solidFill>
+                <a:latin typeface="맑은 고딕"/>
+              </a:rPr>
+              <a:t>· 욕구사정 9항목 — 신체·질병·인지·의사소통·영양·가족환경· 주관적 욕구·자원이용·구강상태</a:t>
+            </a:r>
+          </a:p>
+          <a:p>
+            <a:pPr>
+              <a:spcBef>
+                <a:spcPts val="300"/>
+              </a:spcBef>
+              <a:spcAft>
+                <a:spcPts val="200"/>
+              </a:spcAft>
+            </a:pPr>
+            <a:r>
+              <a:rPr sz="1050" b="0">
+                <a:solidFill>
+                  <a:srgbClr val="1A1A1A"/>
+                </a:solidFill>
+                <a:latin typeface="맑은 고딕"/>
+              </a:rPr>
+              <a:t>· 상담 — 상담일자·수급자·상담직원·상담대상자(관계)·상담내용</a:t>
+            </a:r>
+          </a:p>
+          <a:p>
+            <a:pPr>
+              <a:spcBef>
+                <a:spcPts val="300"/>
+              </a:spcBef>
+              <a:spcAft>
+                <a:spcPts val="200"/>
+              </a:spcAft>
+            </a:pPr>
+            <a:r>
+              <a:rPr sz="1050" b="0">
+                <a:solidFill>
+                  <a:srgbClr val="1A1A1A"/>
+                </a:solidFill>
+                <a:latin typeface="맑은 고딕"/>
+              </a:rPr>
+              <a:t>· 결과평가 — 목표달성·상태변화·계획반영</a:t>
+            </a:r>
+          </a:p>
+          <a:p>
+            <a:pPr>
+              <a:spcBef>
+                <a:spcPts val="300"/>
+              </a:spcBef>
+              <a:spcAft>
+                <a:spcPts val="200"/>
+              </a:spcAft>
+            </a:pPr>
+            <a:r>
+              <a:rPr sz="1050" b="0">
+                <a:solidFill>
+                  <a:srgbClr val="1A1A1A"/>
+                </a:solidFill>
+                <a:latin typeface="맑은 고딕"/>
+              </a:rPr>
+              <a:t>· 수급자별로 기한이 지난 것을 맨 위에 붉게</a:t>
+            </a:r>
+          </a:p>
+          <a:p>
+            <a:pPr>
+              <a:spcBef>
+                <a:spcPts val="900"/>
+              </a:spcBef>
+              <a:spcAft>
+                <a:spcPts val="200"/>
+              </a:spcAft>
+            </a:pPr>
+            <a:r>
+              <a:rPr sz="1170" b="1">
+                <a:solidFill>
+                  <a:srgbClr val="C0206B"/>
+                </a:solidFill>
+                <a:latin typeface="맑은 고딕"/>
+              </a:rPr>
+              <a:t>근거</a:t>
+            </a:r>
+          </a:p>
+          <a:p>
+            <a:pPr>
+              <a:spcBef>
+                <a:spcPts val="300"/>
+              </a:spcBef>
+              <a:spcAft>
+                <a:spcPts val="200"/>
+              </a:spcAft>
+            </a:pPr>
+            <a:r>
+              <a:rPr sz="1050" b="0">
+                <a:solidFill>
+                  <a:srgbClr val="595959"/>
+                </a:solidFill>
+                <a:latin typeface="맑은 고딕"/>
+              </a:rPr>
+              <a:t>· 지표 30 욕구사정 연 1회 이상(대면 원칙)</a:t>
+            </a:r>
+          </a:p>
+          <a:p>
+            <a:pPr>
+              <a:spcBef>
+                <a:spcPts val="300"/>
+              </a:spcBef>
+              <a:spcAft>
+                <a:spcPts val="200"/>
+              </a:spcAft>
+            </a:pPr>
+            <a:r>
+              <a:rPr sz="1050" b="0">
+                <a:solidFill>
+                  <a:srgbClr val="595959"/>
+                </a:solidFill>
+                <a:latin typeface="맑은 고딕"/>
+              </a:rPr>
+              <a:t>· 지표 25 상담 분기 1회 이상 — 필수기재 5개</a:t>
+            </a:r>
+          </a:p>
+          <a:p>
+            <a:pPr>
+              <a:spcBef>
+                <a:spcPts val="300"/>
+              </a:spcBef>
+              <a:spcAft>
+                <a:spcPts val="200"/>
+              </a:spcAft>
+            </a:pPr>
+            <a:r>
+              <a:rPr sz="1050" b="0">
+                <a:solidFill>
+                  <a:srgbClr val="595959"/>
+                </a:solidFill>
+                <a:latin typeface="맑은 고딕"/>
+              </a:rPr>
+              <a:t>· 지표 44 결과평가 반기 — 결과 반영해 계획서 30일 이내 재작성</a:t>
+            </a:r>
+          </a:p>
+          <a:p>
+            <a:pPr>
+              <a:spcBef>
+                <a:spcPts val="900"/>
+              </a:spcBef>
+              <a:spcAft>
+                <a:spcPts val="200"/>
+              </a:spcAft>
+            </a:pPr>
+            <a:r>
+              <a:rPr sz="1170" b="1">
+                <a:solidFill>
+                  <a:srgbClr val="C0206B"/>
+                </a:solidFill>
+                <a:latin typeface="맑은 고딕"/>
+              </a:rPr>
+              <a:t>알아둘 것</a:t>
+            </a:r>
+          </a:p>
+          <a:p>
+            <a:pPr>
+              <a:spcBef>
+                <a:spcPts val="300"/>
+              </a:spcBef>
+              <a:spcAft>
+                <a:spcPts val="200"/>
+              </a:spcAft>
+            </a:pPr>
+            <a:r>
+              <a:rPr sz="1050" b="0">
+                <a:solidFill>
+                  <a:srgbClr val="595959"/>
+                </a:solidFill>
+                <a:latin typeface="맑은 고딕"/>
+              </a:rPr>
+              <a:t>· 매뉴얼이 못박은 것을 화면에 그대로 띄웠다 — 단순 체크는 인정 안 된다. 판단 근거를 서술해야 한다.</a:t>
+            </a:r>
+          </a:p>
+          <a:p>
+            <a:pPr>
+              <a:spcBef>
+                <a:spcPts val="300"/>
+              </a:spcBef>
+              <a:spcAft>
+                <a:spcPts val="200"/>
+              </a:spcAft>
+            </a:pPr>
+            <a:r>
+              <a:rPr sz="1050" b="0">
+                <a:solidFill>
+                  <a:srgbClr val="595959"/>
+                </a:solidFill>
+                <a:latin typeface="맑은 고딕"/>
+              </a:rPr>
+              <a:t>· 욕구사정 9번(구강상태)은 추정이다. 매뉴얼이 '9개'라면서 8개만 열거해 화면에 '※ 확인 필요'를 표시해 뒀다</a:t>
+            </a:r>
+          </a:p>
+        </p:txBody>
+      </p:sp>
     </p:spTree>
   </p:cSld>
   <p:clrMapOvr>
@@ -5773,8 +8851,8 @@
         </p:nvSpPr>
         <p:spPr>
           <a:xfrm>
-            <a:off x="548640" y="384048"/>
-            <a:ext cx="8686800" cy="274320"/>
+            <a:off x="502920" y="347472"/>
+            <a:ext cx="7315200" cy="365760"/>
           </a:xfrm>
           <a:prstGeom prst="rect">
             <a:avLst/>
@@ -5787,6 +8865,14 @@
           </a:bodyPr>
           <a:lstStyle/>
           <a:p>
+            <a:pPr>
+              <a:spcBef>
+                <a:spcPts val="0"/>
+              </a:spcBef>
+              <a:spcAft>
+                <a:spcPts val="200"/>
+              </a:spcAft>
+            </a:pPr>
             <a:r>
               <a:rPr sz="2600" b="1">
                 <a:solidFill>
@@ -5807,8 +8893,8 @@
         </p:nvSpPr>
         <p:spPr>
           <a:xfrm>
-            <a:off x="548640" y="914400"/>
-            <a:ext cx="1463040" cy="28575"/>
+            <a:off x="502920" y="868680"/>
+            <a:ext cx="1280160" cy="28575"/>
           </a:xfrm>
           <a:prstGeom prst="rect">
             <a:avLst/>
@@ -5851,8 +8937,8 @@
         </p:nvSpPr>
         <p:spPr>
           <a:xfrm>
-            <a:off x="548640" y="1024128"/>
-            <a:ext cx="11064240" cy="274320"/>
+            <a:off x="502920" y="969264"/>
+            <a:ext cx="6949440" cy="365760"/>
           </a:xfrm>
           <a:prstGeom prst="rect">
             <a:avLst/>
@@ -5865,14 +8951,22 @@
           </a:bodyPr>
           <a:lstStyle/>
           <a:p>
-            <a:r>
-              <a:rPr sz="1200" b="0">
-                <a:solidFill>
-                  <a:srgbClr val="595959"/>
-                </a:solidFill>
-                <a:latin typeface="맑은 고딕"/>
-              </a:rPr>
-              <a:t>별지 제11호의4서식. 급여 개시 전 작성·동의 후 공단 통보 안내 포함</a:t>
+            <a:pPr>
+              <a:spcBef>
+                <a:spcPts val="0"/>
+              </a:spcBef>
+              <a:spcAft>
+                <a:spcPts val="200"/>
+              </a:spcAft>
+            </a:pPr>
+            <a:r>
+              <a:rPr sz="1300" b="0">
+                <a:solidFill>
+                  <a:srgbClr val="1A1A1A"/>
+                </a:solidFill>
+                <a:latin typeface="맑은 고딕"/>
+              </a:rPr>
+              <a:t>급여 시작 전에 쓰고, 동의를 받아 공단에 통보한다.</a:t>
             </a:r>
           </a:p>
         </p:txBody>
@@ -5893,14 +8987,280 @@
         </p:blipFill>
         <p:spPr>
           <a:xfrm>
-            <a:off x="2575407" y="1463040"/>
-            <a:ext cx="7040880" cy="5029200"/>
+            <a:off x="502920" y="1371600"/>
+            <a:ext cx="6858000" cy="4898571"/>
           </a:xfrm>
           <a:prstGeom prst="rect">
             <a:avLst/>
           </a:prstGeom>
+          <a:ln w="9525">
+            <a:solidFill>
+              <a:srgbClr val="C7C7C7"/>
+            </a:solidFill>
+          </a:ln>
         </p:spPr>
       </p:pic>
+      <p:sp>
+        <p:nvSpPr>
+          <p:cNvPr id="7" name="Rounded Rectangle 6"/>
+          <p:cNvSpPr/>
+          <p:nvPr/>
+        </p:nvSpPr>
+        <p:spPr>
+          <a:xfrm>
+            <a:off x="7589520" y="1371600"/>
+            <a:ext cx="4099255" cy="5029200"/>
+          </a:xfrm>
+          <a:prstGeom prst="roundRect">
+            <a:avLst>
+              <a:gd name="adj" fmla="val 3000"/>
+            </a:avLst>
+          </a:prstGeom>
+          <a:solidFill>
+            <a:srgbClr val="FFFFFF"/>
+          </a:solidFill>
+          <a:ln w="12700">
+            <a:solidFill>
+              <a:srgbClr val="C7C7C7"/>
+            </a:solidFill>
+          </a:ln>
+          <a:effectLst/>
+        </p:spPr>
+        <p:style>
+          <a:lnRef idx="1">
+            <a:schemeClr val="accent1"/>
+          </a:lnRef>
+          <a:fillRef idx="3">
+            <a:schemeClr val="accent1"/>
+          </a:fillRef>
+          <a:effectRef idx="2">
+            <a:schemeClr val="accent1"/>
+          </a:effectRef>
+          <a:fontRef idx="minor">
+            <a:schemeClr val="lt1"/>
+          </a:fontRef>
+        </p:style>
+        <p:txBody>
+          <a:bodyPr rtlCol="0" anchor="ctr"/>
+          <a:lstStyle/>
+          <a:p>
+            <a:pPr algn="ctr"/>
+          </a:p>
+        </p:txBody>
+      </p:sp>
+      <p:sp>
+        <p:nvSpPr>
+          <p:cNvPr id="8" name="TextBox 7"/>
+          <p:cNvSpPr txBox="1"/>
+          <p:nvPr/>
+        </p:nvSpPr>
+        <p:spPr>
+          <a:xfrm>
+            <a:off x="7790688" y="1536192"/>
+            <a:ext cx="3696919" cy="4754880"/>
+          </a:xfrm>
+          <a:prstGeom prst="rect">
+            <a:avLst/>
+          </a:prstGeom>
+          <a:noFill/>
+        </p:spPr>
+        <p:txBody>
+          <a:bodyPr wrap="square" lIns="0" rIns="0" tIns="0" bIns="0">
+            <a:spAutoFit/>
+          </a:bodyPr>
+          <a:lstStyle/>
+          <a:p>
+            <a:pPr>
+              <a:spcBef>
+                <a:spcPts val="0"/>
+              </a:spcBef>
+              <a:spcAft>
+                <a:spcPts val="200"/>
+              </a:spcAft>
+            </a:pPr>
+            <a:r>
+              <a:rPr sz="1170" b="1">
+                <a:solidFill>
+                  <a:srgbClr val="C0206B"/>
+                </a:solidFill>
+                <a:latin typeface="맑은 고딕"/>
+              </a:rPr>
+              <a:t>하는 일</a:t>
+            </a:r>
+          </a:p>
+          <a:p>
+            <a:pPr>
+              <a:spcBef>
+                <a:spcPts val="300"/>
+              </a:spcBef>
+              <a:spcAft>
+                <a:spcPts val="200"/>
+              </a:spcAft>
+            </a:pPr>
+            <a:r>
+              <a:rPr sz="1050" b="0">
+                <a:solidFill>
+                  <a:srgbClr val="1A1A1A"/>
+                </a:solidFill>
+                <a:latin typeface="맑은 고딕"/>
+              </a:rPr>
+              <a:t>· 머리 10칸(등급·인정번호·유효기간·급여종류·계약일·적용기간 등)</a:t>
+            </a:r>
+          </a:p>
+          <a:p>
+            <a:pPr>
+              <a:spcBef>
+                <a:spcPts val="300"/>
+              </a:spcBef>
+              <a:spcAft>
+                <a:spcPts val="200"/>
+              </a:spcAft>
+            </a:pPr>
+            <a:r>
+              <a:rPr sz="1050" b="0">
+                <a:solidFill>
+                  <a:srgbClr val="1A1A1A"/>
+                </a:solidFill>
+                <a:latin typeface="맑은 고딕"/>
+              </a:rPr>
+              <a:t>· 목표 + 내용 표(필요영역·세부목표·필요내용·세부 제공내용·횟수·시간)</a:t>
+            </a:r>
+          </a:p>
+          <a:p>
+            <a:pPr>
+              <a:spcBef>
+                <a:spcPts val="300"/>
+              </a:spcBef>
+              <a:spcAft>
+                <a:spcPts val="200"/>
+              </a:spcAft>
+            </a:pPr>
+            <a:r>
+              <a:rPr sz="1050" b="0">
+                <a:solidFill>
+                  <a:srgbClr val="1A1A1A"/>
+                </a:solidFill>
+                <a:latin typeface="맑은 고딕"/>
+              </a:rPr>
+              <a:t>· 종합의견 · 작성자 · 총괄 확인자 · 동의자(성명·관계·동의일)</a:t>
+            </a:r>
+          </a:p>
+          <a:p>
+            <a:pPr>
+              <a:spcBef>
+                <a:spcPts val="300"/>
+              </a:spcBef>
+              <a:spcAft>
+                <a:spcPts val="200"/>
+              </a:spcAft>
+            </a:pPr>
+            <a:r>
+              <a:rPr sz="1050" b="0">
+                <a:solidFill>
+                  <a:srgbClr val="1A1A1A"/>
+                </a:solidFill>
+                <a:latin typeface="맑은 고딕"/>
+              </a:rPr>
+              <a:t>· 계획서가 없는 이용자를 목록으로 알려준다</a:t>
+            </a:r>
+          </a:p>
+          <a:p>
+            <a:pPr>
+              <a:spcBef>
+                <a:spcPts val="900"/>
+              </a:spcBef>
+              <a:spcAft>
+                <a:spcPts val="200"/>
+              </a:spcAft>
+            </a:pPr>
+            <a:r>
+              <a:rPr sz="1170" b="1">
+                <a:solidFill>
+                  <a:srgbClr val="C0206B"/>
+                </a:solidFill>
+                <a:latin typeface="맑은 고딕"/>
+              </a:rPr>
+              <a:t>근거</a:t>
+            </a:r>
+          </a:p>
+          <a:p>
+            <a:pPr>
+              <a:spcBef>
+                <a:spcPts val="300"/>
+              </a:spcBef>
+              <a:spcAft>
+                <a:spcPts val="200"/>
+              </a:spcAft>
+            </a:pPr>
+            <a:r>
+              <a:rPr sz="1050" b="0">
+                <a:solidFill>
+                  <a:srgbClr val="595959"/>
+                </a:solidFill>
+                <a:latin typeface="맑은 고딕"/>
+              </a:rPr>
+              <a:t>· 시행규칙 별지 제11호의4서식, 개정 2021.6.30</a:t>
+            </a:r>
+          </a:p>
+          <a:p>
+            <a:pPr>
+              <a:spcBef>
+                <a:spcPts val="300"/>
+              </a:spcBef>
+              <a:spcAft>
+                <a:spcPts val="200"/>
+              </a:spcAft>
+            </a:pPr>
+            <a:r>
+              <a:rPr sz="1050" b="0">
+                <a:solidFill>
+                  <a:srgbClr val="595959"/>
+                </a:solidFill>
+                <a:latin typeface="맑은 고딕"/>
+              </a:rPr>
+              <a:t>· 지표 22 — 연 1회 이상 수립, 확인서명, 급여개시일까지 공단 통보</a:t>
+            </a:r>
+          </a:p>
+          <a:p>
+            <a:pPr>
+              <a:spcBef>
+                <a:spcPts val="900"/>
+              </a:spcBef>
+              <a:spcAft>
+                <a:spcPts val="200"/>
+              </a:spcAft>
+            </a:pPr>
+            <a:r>
+              <a:rPr sz="1170" b="1">
+                <a:solidFill>
+                  <a:srgbClr val="C0206B"/>
+                </a:solidFill>
+                <a:latin typeface="맑은 고딕"/>
+              </a:rPr>
+              <a:t>알아둘 것</a:t>
+            </a:r>
+          </a:p>
+          <a:p>
+            <a:pPr>
+              <a:spcBef>
+                <a:spcPts val="300"/>
+              </a:spcBef>
+              <a:spcAft>
+                <a:spcPts val="200"/>
+              </a:spcAft>
+            </a:pPr>
+            <a:r>
+              <a:rPr sz="1050" b="0">
+                <a:solidFill>
+                  <a:srgbClr val="595959"/>
+                </a:solidFill>
+                <a:latin typeface="맑은 고딕"/>
+              </a:rPr>
+              <a:t>· 동의 정보가 비면 붉게 경고한다. 서식상 동의 없이 공단 통보를 할 수 없기 때문</a:t>
+            </a:r>
+          </a:p>
+        </p:txBody>
+      </p:sp>
     </p:spTree>
   </p:cSld>
   <p:clrMapOvr>
@@ -5971,8 +9331,8 @@
         </p:nvSpPr>
         <p:spPr>
           <a:xfrm>
-            <a:off x="548640" y="384048"/>
-            <a:ext cx="8686800" cy="274320"/>
+            <a:off x="502920" y="347472"/>
+            <a:ext cx="7315200" cy="365760"/>
           </a:xfrm>
           <a:prstGeom prst="rect">
             <a:avLst/>
@@ -5985,6 +9345,14 @@
           </a:bodyPr>
           <a:lstStyle/>
           <a:p>
+            <a:pPr>
+              <a:spcBef>
+                <a:spcPts val="0"/>
+              </a:spcBef>
+              <a:spcAft>
+                <a:spcPts val="200"/>
+              </a:spcAft>
+            </a:pPr>
             <a:r>
               <a:rPr sz="2600" b="1">
                 <a:solidFill>
@@ -6005,8 +9373,8 @@
         </p:nvSpPr>
         <p:spPr>
           <a:xfrm>
-            <a:off x="548640" y="914400"/>
-            <a:ext cx="1463040" cy="28575"/>
+            <a:off x="502920" y="868680"/>
+            <a:ext cx="1280160" cy="28575"/>
           </a:xfrm>
           <a:prstGeom prst="rect">
             <a:avLst/>
@@ -6049,8 +9417,8 @@
         </p:nvSpPr>
         <p:spPr>
           <a:xfrm>
-            <a:off x="548640" y="1024128"/>
-            <a:ext cx="11064240" cy="274320"/>
+            <a:off x="502920" y="969264"/>
+            <a:ext cx="6949440" cy="365760"/>
           </a:xfrm>
           <a:prstGeom prst="rect">
             <a:avLst/>
@@ -6063,14 +9431,22 @@
           </a:bodyPr>
           <a:lstStyle/>
           <a:p>
-            <a:r>
-              <a:rPr sz="1200" b="0">
-                <a:solidFill>
-                  <a:srgbClr val="595959"/>
-                </a:solidFill>
-                <a:latin typeface="맑은 고딕"/>
-              </a:rPr>
-              <a:t>평가지표 기반 12종. 마지막 기록일로부터 며칠 지났는지 세어 기한 초과를 붉게</a:t>
+            <a:pPr>
+              <a:spcBef>
+                <a:spcPts val="0"/>
+              </a:spcBef>
+              <a:spcAft>
+                <a:spcPts val="200"/>
+              </a:spcAft>
+            </a:pPr>
+            <a:r>
+              <a:rPr sz="1300" b="0">
+                <a:solidFill>
+                  <a:srgbClr val="1A1A1A"/>
+                </a:solidFill>
+                <a:latin typeface="맑은 고딕"/>
+              </a:rPr>
+              <a:t>빠뜨리기 쉬운 12가지를, 주기를 세어 알려준다.</a:t>
             </a:r>
           </a:p>
         </p:txBody>
@@ -6091,14 +9467,299 @@
         </p:blipFill>
         <p:spPr>
           <a:xfrm>
-            <a:off x="2575407" y="1463040"/>
-            <a:ext cx="7040880" cy="5029200"/>
+            <a:off x="502920" y="1371600"/>
+            <a:ext cx="6858000" cy="4898571"/>
           </a:xfrm>
           <a:prstGeom prst="rect">
             <a:avLst/>
           </a:prstGeom>
+          <a:ln w="9525">
+            <a:solidFill>
+              <a:srgbClr val="C7C7C7"/>
+            </a:solidFill>
+          </a:ln>
         </p:spPr>
       </p:pic>
+      <p:sp>
+        <p:nvSpPr>
+          <p:cNvPr id="7" name="Rounded Rectangle 6"/>
+          <p:cNvSpPr/>
+          <p:nvPr/>
+        </p:nvSpPr>
+        <p:spPr>
+          <a:xfrm>
+            <a:off x="7589520" y="1371600"/>
+            <a:ext cx="4099255" cy="5029200"/>
+          </a:xfrm>
+          <a:prstGeom prst="roundRect">
+            <a:avLst>
+              <a:gd name="adj" fmla="val 3000"/>
+            </a:avLst>
+          </a:prstGeom>
+          <a:solidFill>
+            <a:srgbClr val="FFFFFF"/>
+          </a:solidFill>
+          <a:ln w="12700">
+            <a:solidFill>
+              <a:srgbClr val="C7C7C7"/>
+            </a:solidFill>
+          </a:ln>
+          <a:effectLst/>
+        </p:spPr>
+        <p:style>
+          <a:lnRef idx="1">
+            <a:schemeClr val="accent1"/>
+          </a:lnRef>
+          <a:fillRef idx="3">
+            <a:schemeClr val="accent1"/>
+          </a:fillRef>
+          <a:effectRef idx="2">
+            <a:schemeClr val="accent1"/>
+          </a:effectRef>
+          <a:fontRef idx="minor">
+            <a:schemeClr val="lt1"/>
+          </a:fontRef>
+        </p:style>
+        <p:txBody>
+          <a:bodyPr rtlCol="0" anchor="ctr"/>
+          <a:lstStyle/>
+          <a:p>
+            <a:pPr algn="ctr"/>
+          </a:p>
+        </p:txBody>
+      </p:sp>
+      <p:sp>
+        <p:nvSpPr>
+          <p:cNvPr id="8" name="TextBox 7"/>
+          <p:cNvSpPr txBox="1"/>
+          <p:nvPr/>
+        </p:nvSpPr>
+        <p:spPr>
+          <a:xfrm>
+            <a:off x="7790688" y="1536192"/>
+            <a:ext cx="3696919" cy="4754880"/>
+          </a:xfrm>
+          <a:prstGeom prst="rect">
+            <a:avLst/>
+          </a:prstGeom>
+          <a:noFill/>
+        </p:spPr>
+        <p:txBody>
+          <a:bodyPr wrap="square" lIns="0" rIns="0" tIns="0" bIns="0">
+            <a:spAutoFit/>
+          </a:bodyPr>
+          <a:lstStyle/>
+          <a:p>
+            <a:pPr>
+              <a:spcBef>
+                <a:spcPts val="0"/>
+              </a:spcBef>
+              <a:spcAft>
+                <a:spcPts val="200"/>
+              </a:spcAft>
+            </a:pPr>
+            <a:r>
+              <a:rPr sz="1070" b="1">
+                <a:solidFill>
+                  <a:srgbClr val="C0206B"/>
+                </a:solidFill>
+                <a:latin typeface="맑은 고딕"/>
+              </a:rPr>
+              <a:t>하는 일</a:t>
+            </a:r>
+          </a:p>
+          <a:p>
+            <a:pPr>
+              <a:spcBef>
+                <a:spcPts val="300"/>
+              </a:spcBef>
+              <a:spcAft>
+                <a:spcPts val="200"/>
+              </a:spcAft>
+            </a:pPr>
+            <a:r>
+              <a:rPr sz="950" b="0">
+                <a:solidFill>
+                  <a:srgbClr val="1A1A1A"/>
+                </a:solidFill>
+                <a:latin typeface="맑은 고딕"/>
+              </a:rPr>
+              <a:t>· 신체기능 프로그램(주3회) · 인지기능 프로그램(주3회) · 사회적응 프로그램(월1회)</a:t>
+            </a:r>
+          </a:p>
+          <a:p>
+            <a:pPr>
+              <a:spcBef>
+                <a:spcPts val="300"/>
+              </a:spcBef>
+              <a:spcAft>
+                <a:spcPts val="200"/>
+              </a:spcAft>
+            </a:pPr>
+            <a:r>
+              <a:rPr sz="950" b="0">
+                <a:solidFill>
+                  <a:srgbClr val="1A1A1A"/>
+                </a:solidFill>
+                <a:latin typeface="맑은 고딕"/>
+              </a:rPr>
+              <a:t>· 차량운행일지(매일) · 실내환기 점검(매일) · 소방설비(매월)</a:t>
+            </a:r>
+          </a:p>
+          <a:p>
+            <a:pPr>
+              <a:spcBef>
+                <a:spcPts val="300"/>
+              </a:spcBef>
+              <a:spcAft>
+                <a:spcPts val="200"/>
+              </a:spcAft>
+            </a:pPr>
+            <a:r>
+              <a:rPr sz="950" b="0">
+                <a:solidFill>
+                  <a:srgbClr val="1A1A1A"/>
+                </a:solidFill>
+                <a:latin typeface="맑은 고딕"/>
+              </a:rPr>
+              <a:t>· 소독·감염관리(분기) · 재난훈련(반기) · 사례관리 회의(반기) · 위험도 평가(반기) · 종사자 교육(매년) · 건강검진(매년)</a:t>
+            </a:r>
+          </a:p>
+          <a:p>
+            <a:pPr>
+              <a:spcBef>
+                <a:spcPts val="300"/>
+              </a:spcBef>
+              <a:spcAft>
+                <a:spcPts val="200"/>
+              </a:spcAft>
+            </a:pPr>
+            <a:r>
+              <a:rPr sz="950" b="0">
+                <a:solidFill>
+                  <a:srgbClr val="1A1A1A"/>
+                </a:solidFill>
+                <a:latin typeface="맑은 고딕"/>
+              </a:rPr>
+              <a:t>· 마지막 기록일로부터 며칠 지났는지 세어 기한 초과를 붉게</a:t>
+            </a:r>
+          </a:p>
+          <a:p>
+            <a:pPr>
+              <a:spcBef>
+                <a:spcPts val="900"/>
+              </a:spcBef>
+              <a:spcAft>
+                <a:spcPts val="200"/>
+              </a:spcAft>
+            </a:pPr>
+            <a:r>
+              <a:rPr sz="1070" b="1">
+                <a:solidFill>
+                  <a:srgbClr val="C0206B"/>
+                </a:solidFill>
+                <a:latin typeface="맑은 고딕"/>
+              </a:rPr>
+              <a:t>근거</a:t>
+            </a:r>
+          </a:p>
+          <a:p>
+            <a:pPr>
+              <a:spcBef>
+                <a:spcPts val="300"/>
+              </a:spcBef>
+              <a:spcAft>
+                <a:spcPts val="200"/>
+              </a:spcAft>
+            </a:pPr>
+            <a:r>
+              <a:rPr sz="950" b="0">
+                <a:solidFill>
+                  <a:srgbClr val="595959"/>
+                </a:solidFill>
+                <a:latin typeface="맑은 고딕"/>
+              </a:rPr>
+              <a:t>· 2026 재가급여(주야간보호) 평가매뉴얼</a:t>
+            </a:r>
+          </a:p>
+          <a:p>
+            <a:pPr>
+              <a:spcBef>
+                <a:spcPts val="300"/>
+              </a:spcBef>
+              <a:spcAft>
+                <a:spcPts val="200"/>
+              </a:spcAft>
+            </a:pPr>
+            <a:r>
+              <a:rPr sz="950" b="0">
+                <a:solidFill>
+                  <a:srgbClr val="595959"/>
+                </a:solidFill>
+                <a:latin typeface="맑은 고딕"/>
+              </a:rPr>
+              <a:t>· 지표 24·25·26(프로그램) · 28(이동서비스) · 9(환기) · 16(소독) · 13(소방) · 11(재난) · 29(사례관리) · 20·21(위험도) · 6(교육) · 15(검진)</a:t>
+            </a:r>
+          </a:p>
+          <a:p>
+            <a:pPr>
+              <a:spcBef>
+                <a:spcPts val="900"/>
+              </a:spcBef>
+              <a:spcAft>
+                <a:spcPts val="200"/>
+              </a:spcAft>
+            </a:pPr>
+            <a:r>
+              <a:rPr sz="1070" b="1">
+                <a:solidFill>
+                  <a:srgbClr val="C0206B"/>
+                </a:solidFill>
+                <a:latin typeface="맑은 고딕"/>
+              </a:rPr>
+              <a:t>알아둘 것</a:t>
+            </a:r>
+          </a:p>
+          <a:p>
+            <a:pPr>
+              <a:spcBef>
+                <a:spcPts val="300"/>
+              </a:spcBef>
+              <a:spcAft>
+                <a:spcPts val="200"/>
+              </a:spcAft>
+            </a:pPr>
+            <a:r>
+              <a:rPr sz="950" b="0">
+                <a:solidFill>
+                  <a:srgbClr val="595959"/>
+                </a:solidFill>
+                <a:latin typeface="맑은 고딕"/>
+              </a:rPr>
+              <a:t>· 기록하는 것 자체는 어렵지 않다. 빠뜨리는 게 문제다. 평가에서 '이거 언제 했냐'에 답이 안 나오면 점수가 깎인다</a:t>
+            </a:r>
+          </a:p>
+          <a:p>
+            <a:pPr>
+              <a:spcBef>
+                <a:spcPts val="300"/>
+              </a:spcBef>
+              <a:spcAft>
+                <a:spcPts val="200"/>
+              </a:spcAft>
+            </a:pPr>
+            <a:r>
+              <a:rPr sz="950" b="0">
+                <a:solidFill>
+                  <a:srgbClr val="595959"/>
+                </a:solidFill>
+                <a:latin typeface="맑은 고딕"/>
+              </a:rPr>
+              <a:t>· 프로그램을 셋으로 나눈 이유 — 한 대장에 묶으면 사회적응(월1회)이 신체기능(주3회) 주기에 묻힌다</a:t>
+            </a:r>
+          </a:p>
+        </p:txBody>
+      </p:sp>
     </p:spTree>
   </p:cSld>
   <p:clrMapOvr>
@@ -6169,8 +9830,8 @@
         </p:nvSpPr>
         <p:spPr>
           <a:xfrm>
-            <a:off x="548640" y="384048"/>
-            <a:ext cx="8686800" cy="274320"/>
+            <a:off x="502920" y="347472"/>
+            <a:ext cx="7315200" cy="365760"/>
           </a:xfrm>
           <a:prstGeom prst="rect">
             <a:avLst/>
@@ -6183,6 +9844,14 @@
           </a:bodyPr>
           <a:lstStyle/>
           <a:p>
+            <a:pPr>
+              <a:spcBef>
+                <a:spcPts val="0"/>
+              </a:spcBef>
+              <a:spcAft>
+                <a:spcPts val="200"/>
+              </a:spcAft>
+            </a:pPr>
             <a:r>
               <a:rPr sz="2600" b="1">
                 <a:solidFill>
@@ -6203,8 +9872,8 @@
         </p:nvSpPr>
         <p:spPr>
           <a:xfrm>
-            <a:off x="548640" y="914400"/>
-            <a:ext cx="1463040" cy="28575"/>
+            <a:off x="502920" y="868680"/>
+            <a:ext cx="1280160" cy="28575"/>
           </a:xfrm>
           <a:prstGeom prst="rect">
             <a:avLst/>
@@ -6247,8 +9916,8 @@
         </p:nvSpPr>
         <p:spPr>
           <a:xfrm>
-            <a:off x="548640" y="1024128"/>
-            <a:ext cx="11064240" cy="274320"/>
+            <a:off x="502920" y="969264"/>
+            <a:ext cx="6949440" cy="365760"/>
           </a:xfrm>
           <a:prstGeom prst="rect">
             <a:avLst/>
@@ -6261,14 +9930,22 @@
           </a:bodyPr>
           <a:lstStyle/>
           <a:p>
-            <a:r>
-              <a:rPr sz="1200" b="0">
-                <a:solidFill>
-                  <a:srgbClr val="595959"/>
-                </a:solidFill>
-                <a:latin typeface="맑은 고딕"/>
-              </a:rPr>
-              <a:t>명부·주의사항(낙상 위험 등)·오늘 안 채운 칸</a:t>
+            <a:pPr>
+              <a:spcBef>
+                <a:spcPts val="0"/>
+              </a:spcBef>
+              <a:spcAft>
+                <a:spcPts val="200"/>
+              </a:spcAft>
+            </a:pPr>
+            <a:r>
+              <a:rPr sz="1300" b="0">
+                <a:solidFill>
+                  <a:srgbClr val="1A1A1A"/>
+                </a:solidFill>
+                <a:latin typeface="맑은 고딕"/>
+              </a:rPr>
+              <a:t>명부와 주의사항, 그리고 오늘 남은 것.</a:t>
             </a:r>
           </a:p>
         </p:txBody>
@@ -6289,14 +9966,242 @@
         </p:blipFill>
         <p:spPr>
           <a:xfrm>
-            <a:off x="2575407" y="1463040"/>
-            <a:ext cx="7040880" cy="5029200"/>
+            <a:off x="502920" y="1371600"/>
+            <a:ext cx="6858000" cy="4898571"/>
           </a:xfrm>
           <a:prstGeom prst="rect">
             <a:avLst/>
           </a:prstGeom>
+          <a:ln w="9525">
+            <a:solidFill>
+              <a:srgbClr val="C7C7C7"/>
+            </a:solidFill>
+          </a:ln>
         </p:spPr>
       </p:pic>
+      <p:sp>
+        <p:nvSpPr>
+          <p:cNvPr id="7" name="Rounded Rectangle 6"/>
+          <p:cNvSpPr/>
+          <p:nvPr/>
+        </p:nvSpPr>
+        <p:spPr>
+          <a:xfrm>
+            <a:off x="7589520" y="1371600"/>
+            <a:ext cx="4099255" cy="5029200"/>
+          </a:xfrm>
+          <a:prstGeom prst="roundRect">
+            <a:avLst>
+              <a:gd name="adj" fmla="val 3000"/>
+            </a:avLst>
+          </a:prstGeom>
+          <a:solidFill>
+            <a:srgbClr val="FFFFFF"/>
+          </a:solidFill>
+          <a:ln w="12700">
+            <a:solidFill>
+              <a:srgbClr val="C7C7C7"/>
+            </a:solidFill>
+          </a:ln>
+          <a:effectLst/>
+        </p:spPr>
+        <p:style>
+          <a:lnRef idx="1">
+            <a:schemeClr val="accent1"/>
+          </a:lnRef>
+          <a:fillRef idx="3">
+            <a:schemeClr val="accent1"/>
+          </a:fillRef>
+          <a:effectRef idx="2">
+            <a:schemeClr val="accent1"/>
+          </a:effectRef>
+          <a:fontRef idx="minor">
+            <a:schemeClr val="lt1"/>
+          </a:fontRef>
+        </p:style>
+        <p:txBody>
+          <a:bodyPr rtlCol="0" anchor="ctr"/>
+          <a:lstStyle/>
+          <a:p>
+            <a:pPr algn="ctr"/>
+          </a:p>
+        </p:txBody>
+      </p:sp>
+      <p:sp>
+        <p:nvSpPr>
+          <p:cNvPr id="8" name="TextBox 7"/>
+          <p:cNvSpPr txBox="1"/>
+          <p:nvPr/>
+        </p:nvSpPr>
+        <p:spPr>
+          <a:xfrm>
+            <a:off x="7790688" y="1536192"/>
+            <a:ext cx="3696919" cy="4754880"/>
+          </a:xfrm>
+          <a:prstGeom prst="rect">
+            <a:avLst/>
+          </a:prstGeom>
+          <a:noFill/>
+        </p:spPr>
+        <p:txBody>
+          <a:bodyPr wrap="square" lIns="0" rIns="0" tIns="0" bIns="0">
+            <a:spAutoFit/>
+          </a:bodyPr>
+          <a:lstStyle/>
+          <a:p>
+            <a:pPr>
+              <a:spcBef>
+                <a:spcPts val="0"/>
+              </a:spcBef>
+              <a:spcAft>
+                <a:spcPts val="200"/>
+              </a:spcAft>
+            </a:pPr>
+            <a:r>
+              <a:rPr sz="1170" b="1">
+                <a:solidFill>
+                  <a:srgbClr val="C0206B"/>
+                </a:solidFill>
+                <a:latin typeface="맑은 고딕"/>
+              </a:rPr>
+              <a:t>하는 일</a:t>
+            </a:r>
+          </a:p>
+          <a:p>
+            <a:pPr>
+              <a:spcBef>
+                <a:spcPts val="300"/>
+              </a:spcBef>
+              <a:spcAft>
+                <a:spcPts val="200"/>
+              </a:spcAft>
+            </a:pPr>
+            <a:r>
+              <a:rPr sz="1050" b="0">
+                <a:solidFill>
+                  <a:srgbClr val="1A1A1A"/>
+                </a:solidFill>
+                <a:latin typeface="맑은 고딕"/>
+              </a:rPr>
+              <a:t>· 이름(가명·코드 권장) · 생년 · 자리 · 주의사항 · 메모</a:t>
+            </a:r>
+          </a:p>
+          <a:p>
+            <a:pPr>
+              <a:spcBef>
+                <a:spcPts val="300"/>
+              </a:spcBef>
+              <a:spcAft>
+                <a:spcPts val="200"/>
+              </a:spcAft>
+            </a:pPr>
+            <a:r>
+              <a:rPr sz="1050" b="0">
+                <a:solidFill>
+                  <a:srgbClr val="1A1A1A"/>
+                </a:solidFill>
+                <a:latin typeface="맑은 고딕"/>
+              </a:rPr>
+              <a:t>· 주의사항은 붉게 — 낙상 위험, 삼킴 곤란처럼 놓치면 사고가 되는 것</a:t>
+            </a:r>
+          </a:p>
+          <a:p>
+            <a:pPr>
+              <a:spcBef>
+                <a:spcPts val="300"/>
+              </a:spcBef>
+              <a:spcAft>
+                <a:spcPts val="200"/>
+              </a:spcAft>
+            </a:pPr>
+            <a:r>
+              <a:rPr sz="1050" b="0">
+                <a:solidFill>
+                  <a:srgbClr val="1A1A1A"/>
+                </a:solidFill>
+                <a:latin typeface="맑은 고딕"/>
+              </a:rPr>
+              <a:t>· 이용자마다 오늘 서식에서 안 채운 칸을 보여준다</a:t>
+            </a:r>
+          </a:p>
+          <a:p>
+            <a:pPr>
+              <a:spcBef>
+                <a:spcPts val="900"/>
+              </a:spcBef>
+              <a:spcAft>
+                <a:spcPts val="200"/>
+              </a:spcAft>
+            </a:pPr>
+            <a:r>
+              <a:rPr sz="1170" b="1">
+                <a:solidFill>
+                  <a:srgbClr val="C0206B"/>
+                </a:solidFill>
+                <a:latin typeface="맑은 고딕"/>
+              </a:rPr>
+              <a:t>근거</a:t>
+            </a:r>
+          </a:p>
+          <a:p>
+            <a:pPr>
+              <a:spcBef>
+                <a:spcPts val="300"/>
+              </a:spcBef>
+              <a:spcAft>
+                <a:spcPts val="200"/>
+              </a:spcAft>
+            </a:pPr>
+            <a:r>
+              <a:rPr sz="1050" b="0">
+                <a:solidFill>
+                  <a:srgbClr val="595959"/>
+                </a:solidFill>
+                <a:latin typeface="맑은 고딕"/>
+              </a:rPr>
+              <a:t>· 논문 AS-IS 문제 2 — 기능 수준이 다른 이용자가 한 프로그램에 섞인다</a:t>
+            </a:r>
+          </a:p>
+          <a:p>
+            <a:pPr>
+              <a:spcBef>
+                <a:spcPts val="900"/>
+              </a:spcBef>
+              <a:spcAft>
+                <a:spcPts val="200"/>
+              </a:spcAft>
+            </a:pPr>
+            <a:r>
+              <a:rPr sz="1170" b="1">
+                <a:solidFill>
+                  <a:srgbClr val="C0206B"/>
+                </a:solidFill>
+                <a:latin typeface="맑은 고딕"/>
+              </a:rPr>
+              <a:t>알아둘 것</a:t>
+            </a:r>
+          </a:p>
+          <a:p>
+            <a:pPr>
+              <a:spcBef>
+                <a:spcPts val="300"/>
+              </a:spcBef>
+              <a:spcAft>
+                <a:spcPts val="200"/>
+              </a:spcAft>
+            </a:pPr>
+            <a:r>
+              <a:rPr sz="1050" b="0">
+                <a:solidFill>
+                  <a:srgbClr val="595959"/>
+                </a:solidFill>
+                <a:latin typeface="맑은 고딕"/>
+              </a:rPr>
+              <a:t>· 시연 단계에서는 가명·코드로 등록하도록 화면에 안내한다. 음성 인식이 이름을 구글 서버로 보내기 때문</a:t>
+            </a:r>
+          </a:p>
+        </p:txBody>
+      </p:sp>
     </p:spTree>
   </p:cSld>
   <p:clrMapOvr>
